--- a/docs/pptx/entire/ritu-entire-linsubhr-ratio-grade3_10pct.pptx
+++ b/docs/pptx/entire/ritu-entire-linsubhr-ratio-grade3_10pct.pptx
@@ -3433,560 +3433,560 @@
           <p:spPr>
             <a:xfrm>
               <a:off x="1172049" y="2073503"/>
-              <a:ext cx="7090630" cy="3411047"/>
+              <a:ext cx="7090630" cy="3411612"/>
             </a:xfrm>
             <a:custGeom>
               <a:avLst/>
               <a:pathLst>
-                <a:path w="7090630" h="3411047">
+                <a:path w="7090630" h="3411612">
                   <a:moveTo>
-                    <a:pt x="1250424" y="0"/>
+                    <a:pt x="1257338" y="0"/>
                   </a:moveTo>
                   <a:lnTo>
-                    <a:pt x="1289205" y="89315"/>
-                  </a:lnTo>
-                  <a:lnTo>
-                    <a:pt x="1360827" y="246624"/>
-                  </a:lnTo>
-                  <a:lnTo>
-                    <a:pt x="1432450" y="396642"/>
-                  </a:lnTo>
-                  <a:lnTo>
-                    <a:pt x="1504073" y="539708"/>
-                  </a:lnTo>
-                  <a:lnTo>
-                    <a:pt x="1575695" y="676144"/>
-                  </a:lnTo>
-                  <a:lnTo>
-                    <a:pt x="1647318" y="806258"/>
-                  </a:lnTo>
-                  <a:lnTo>
-                    <a:pt x="1718940" y="930341"/>
-                  </a:lnTo>
-                  <a:lnTo>
-                    <a:pt x="1790563" y="1048674"/>
-                  </a:lnTo>
-                  <a:lnTo>
-                    <a:pt x="1862185" y="1161523"/>
-                  </a:lnTo>
-                  <a:lnTo>
-                    <a:pt x="1933808" y="1269142"/>
-                  </a:lnTo>
-                  <a:lnTo>
-                    <a:pt x="2005430" y="1371774"/>
-                  </a:lnTo>
-                  <a:lnTo>
-                    <a:pt x="2077053" y="1469649"/>
-                  </a:lnTo>
-                  <a:lnTo>
-                    <a:pt x="2148675" y="1562989"/>
-                  </a:lnTo>
-                  <a:lnTo>
-                    <a:pt x="2220298" y="1652003"/>
-                  </a:lnTo>
-                  <a:lnTo>
-                    <a:pt x="2291920" y="1736892"/>
-                  </a:lnTo>
-                  <a:lnTo>
-                    <a:pt x="2363543" y="1817846"/>
-                  </a:lnTo>
-                  <a:lnTo>
-                    <a:pt x="2435165" y="1895049"/>
-                  </a:lnTo>
-                  <a:lnTo>
-                    <a:pt x="2506788" y="1968675"/>
-                  </a:lnTo>
-                  <a:lnTo>
-                    <a:pt x="2578410" y="2038888"/>
-                  </a:lnTo>
-                  <a:lnTo>
-                    <a:pt x="2650033" y="2105847"/>
-                  </a:lnTo>
-                  <a:lnTo>
-                    <a:pt x="2721655" y="2169703"/>
-                  </a:lnTo>
-                  <a:lnTo>
-                    <a:pt x="2793278" y="2230600"/>
-                  </a:lnTo>
-                  <a:lnTo>
-                    <a:pt x="2864901" y="2288675"/>
-                  </a:lnTo>
-                  <a:lnTo>
-                    <a:pt x="2936523" y="2344058"/>
-                  </a:lnTo>
-                  <a:lnTo>
-                    <a:pt x="3008146" y="2396875"/>
-                  </a:lnTo>
-                  <a:lnTo>
-                    <a:pt x="3079768" y="2447244"/>
-                  </a:lnTo>
-                  <a:lnTo>
-                    <a:pt x="3151391" y="2495279"/>
-                  </a:lnTo>
-                  <a:lnTo>
-                    <a:pt x="3223013" y="2541088"/>
-                  </a:lnTo>
-                  <a:lnTo>
-                    <a:pt x="3294636" y="2584773"/>
-                  </a:lnTo>
-                  <a:lnTo>
-                    <a:pt x="3366258" y="2626435"/>
-                  </a:lnTo>
-                  <a:lnTo>
-                    <a:pt x="3437881" y="2660945"/>
-                  </a:lnTo>
-                  <a:lnTo>
-                    <a:pt x="3509503" y="2682481"/>
-                  </a:lnTo>
-                  <a:lnTo>
-                    <a:pt x="3581126" y="2703452"/>
-                  </a:lnTo>
-                  <a:lnTo>
-                    <a:pt x="3652748" y="2723875"/>
-                  </a:lnTo>
-                  <a:lnTo>
-                    <a:pt x="3724371" y="2743763"/>
-                  </a:lnTo>
-                  <a:lnTo>
-                    <a:pt x="3795993" y="2763131"/>
-                  </a:lnTo>
-                  <a:lnTo>
-                    <a:pt x="3867616" y="2781992"/>
-                  </a:lnTo>
-                  <a:lnTo>
-                    <a:pt x="3939238" y="2800359"/>
-                  </a:lnTo>
-                  <a:lnTo>
-                    <a:pt x="4010861" y="2818245"/>
-                  </a:lnTo>
-                  <a:lnTo>
-                    <a:pt x="4082483" y="2835663"/>
-                  </a:lnTo>
-                  <a:lnTo>
-                    <a:pt x="4154106" y="2852626"/>
-                  </a:lnTo>
-                  <a:lnTo>
-                    <a:pt x="4225729" y="2869144"/>
-                  </a:lnTo>
-                  <a:lnTo>
-                    <a:pt x="4297351" y="2885230"/>
-                  </a:lnTo>
-                  <a:lnTo>
-                    <a:pt x="4368974" y="2900895"/>
-                  </a:lnTo>
-                  <a:lnTo>
-                    <a:pt x="4440596" y="2916150"/>
-                  </a:lnTo>
-                  <a:lnTo>
-                    <a:pt x="4512219" y="2931006"/>
-                  </a:lnTo>
-                  <a:lnTo>
-                    <a:pt x="4583841" y="2945473"/>
-                  </a:lnTo>
-                  <a:lnTo>
-                    <a:pt x="4655464" y="2959561"/>
-                  </a:lnTo>
-                  <a:lnTo>
-                    <a:pt x="4727086" y="2973281"/>
-                  </a:lnTo>
-                  <a:lnTo>
-                    <a:pt x="4798709" y="2986641"/>
-                  </a:lnTo>
-                  <a:lnTo>
-                    <a:pt x="4870331" y="2999652"/>
-                  </a:lnTo>
-                  <a:lnTo>
-                    <a:pt x="4941954" y="3012322"/>
-                  </a:lnTo>
-                  <a:lnTo>
-                    <a:pt x="5013576" y="3024661"/>
-                  </a:lnTo>
-                  <a:lnTo>
-                    <a:pt x="5085199" y="3036677"/>
-                  </a:lnTo>
-                  <a:lnTo>
-                    <a:pt x="5156821" y="3048378"/>
-                  </a:lnTo>
-                  <a:lnTo>
-                    <a:pt x="5228444" y="3059773"/>
-                  </a:lnTo>
-                  <a:lnTo>
-                    <a:pt x="5300066" y="3070870"/>
-                  </a:lnTo>
-                  <a:lnTo>
-                    <a:pt x="5371689" y="3081676"/>
-                  </a:lnTo>
-                  <a:lnTo>
-                    <a:pt x="5443311" y="3092199"/>
-                  </a:lnTo>
-                  <a:lnTo>
-                    <a:pt x="5514934" y="3102447"/>
-                  </a:lnTo>
-                  <a:lnTo>
-                    <a:pt x="5586557" y="3112427"/>
-                  </a:lnTo>
-                  <a:lnTo>
-                    <a:pt x="5658179" y="3122146"/>
-                  </a:lnTo>
-                  <a:lnTo>
-                    <a:pt x="5729802" y="3131610"/>
-                  </a:lnTo>
-                  <a:lnTo>
-                    <a:pt x="5801424" y="3140827"/>
-                  </a:lnTo>
-                  <a:lnTo>
-                    <a:pt x="5873047" y="3149802"/>
-                  </a:lnTo>
-                  <a:lnTo>
-                    <a:pt x="5944669" y="3158542"/>
-                  </a:lnTo>
-                  <a:lnTo>
-                    <a:pt x="6016292" y="3167054"/>
-                  </a:lnTo>
-                  <a:lnTo>
-                    <a:pt x="6087914" y="3175343"/>
-                  </a:lnTo>
-                  <a:lnTo>
-                    <a:pt x="6159537" y="3183415"/>
-                  </a:lnTo>
-                  <a:lnTo>
-                    <a:pt x="6231159" y="3191275"/>
-                  </a:lnTo>
-                  <a:lnTo>
-                    <a:pt x="6302782" y="3198930"/>
-                  </a:lnTo>
-                  <a:lnTo>
-                    <a:pt x="6374404" y="3206385"/>
-                  </a:lnTo>
-                  <a:lnTo>
-                    <a:pt x="6446027" y="3213644"/>
-                  </a:lnTo>
-                  <a:lnTo>
-                    <a:pt x="6517649" y="3220713"/>
-                  </a:lnTo>
-                  <a:lnTo>
-                    <a:pt x="6589272" y="3227598"/>
-                  </a:lnTo>
-                  <a:lnTo>
-                    <a:pt x="6660894" y="3234302"/>
-                  </a:lnTo>
-                  <a:lnTo>
-                    <a:pt x="6732517" y="3240831"/>
-                  </a:lnTo>
-                  <a:lnTo>
-                    <a:pt x="6804139" y="3247189"/>
-                  </a:lnTo>
-                  <a:lnTo>
-                    <a:pt x="6875762" y="3253380"/>
-                  </a:lnTo>
-                  <a:lnTo>
-                    <a:pt x="6947385" y="3259410"/>
-                  </a:lnTo>
-                  <a:lnTo>
-                    <a:pt x="7019007" y="3265281"/>
-                  </a:lnTo>
-                  <a:lnTo>
-                    <a:pt x="7090630" y="3270999"/>
-                  </a:lnTo>
-                  <a:lnTo>
-                    <a:pt x="7090630" y="3411047"/>
-                  </a:lnTo>
-                  <a:lnTo>
-                    <a:pt x="7019007" y="3407514"/>
-                  </a:lnTo>
-                  <a:lnTo>
-                    <a:pt x="6947385" y="3403810"/>
-                  </a:lnTo>
-                  <a:lnTo>
-                    <a:pt x="6875762" y="3399925"/>
-                  </a:lnTo>
-                  <a:lnTo>
-                    <a:pt x="6804139" y="3395852"/>
-                  </a:lnTo>
-                  <a:lnTo>
-                    <a:pt x="6732517" y="3391581"/>
-                  </a:lnTo>
-                  <a:lnTo>
-                    <a:pt x="6660894" y="3387102"/>
-                  </a:lnTo>
-                  <a:lnTo>
-                    <a:pt x="6589272" y="3382406"/>
-                  </a:lnTo>
-                  <a:lnTo>
-                    <a:pt x="6517649" y="3377481"/>
-                  </a:lnTo>
-                  <a:lnTo>
-                    <a:pt x="6446027" y="3372317"/>
-                  </a:lnTo>
-                  <a:lnTo>
-                    <a:pt x="6374404" y="3366902"/>
-                  </a:lnTo>
-                  <a:lnTo>
-                    <a:pt x="6302782" y="3361224"/>
-                  </a:lnTo>
-                  <a:lnTo>
-                    <a:pt x="6231159" y="3355270"/>
-                  </a:lnTo>
-                  <a:lnTo>
-                    <a:pt x="6159537" y="3349027"/>
-                  </a:lnTo>
-                  <a:lnTo>
-                    <a:pt x="6087914" y="3342480"/>
-                  </a:lnTo>
-                  <a:lnTo>
-                    <a:pt x="6016292" y="3335615"/>
-                  </a:lnTo>
-                  <a:lnTo>
-                    <a:pt x="5944669" y="3328416"/>
-                  </a:lnTo>
-                  <a:lnTo>
-                    <a:pt x="5873047" y="3320868"/>
-                  </a:lnTo>
-                  <a:lnTo>
-                    <a:pt x="5801424" y="3312953"/>
-                  </a:lnTo>
-                  <a:lnTo>
-                    <a:pt x="5729802" y="3304653"/>
-                  </a:lnTo>
-                  <a:lnTo>
-                    <a:pt x="5658179" y="3295950"/>
-                  </a:lnTo>
-                  <a:lnTo>
-                    <a:pt x="5586557" y="3286824"/>
-                  </a:lnTo>
-                  <a:lnTo>
-                    <a:pt x="5514934" y="3277255"/>
-                  </a:lnTo>
-                  <a:lnTo>
-                    <a:pt x="5443311" y="3267220"/>
-                  </a:lnTo>
-                  <a:lnTo>
-                    <a:pt x="5371689" y="3256698"/>
-                  </a:lnTo>
-                  <a:lnTo>
-                    <a:pt x="5300066" y="3245665"/>
-                  </a:lnTo>
-                  <a:lnTo>
-                    <a:pt x="5228444" y="3234095"/>
-                  </a:lnTo>
-                  <a:lnTo>
-                    <a:pt x="5156821" y="3221963"/>
-                  </a:lnTo>
-                  <a:lnTo>
-                    <a:pt x="5085199" y="3209242"/>
-                  </a:lnTo>
-                  <a:lnTo>
-                    <a:pt x="5013576" y="3195902"/>
-                  </a:lnTo>
-                  <a:lnTo>
-                    <a:pt x="4941954" y="3181914"/>
-                  </a:lnTo>
-                  <a:lnTo>
-                    <a:pt x="4870331" y="3167247"/>
-                  </a:lnTo>
-                  <a:lnTo>
-                    <a:pt x="4798709" y="3151866"/>
-                  </a:lnTo>
-                  <a:lnTo>
-                    <a:pt x="4727086" y="3135738"/>
-                  </a:lnTo>
-                  <a:lnTo>
-                    <a:pt x="4655464" y="3118827"/>
-                  </a:lnTo>
-                  <a:lnTo>
-                    <a:pt x="4583841" y="3101094"/>
-                  </a:lnTo>
-                  <a:lnTo>
-                    <a:pt x="4512219" y="3082499"/>
-                  </a:lnTo>
-                  <a:lnTo>
-                    <a:pt x="4440596" y="3063000"/>
-                  </a:lnTo>
-                  <a:lnTo>
-                    <a:pt x="4368974" y="3042553"/>
-                  </a:lnTo>
-                  <a:lnTo>
-                    <a:pt x="4297351" y="3021114"/>
-                  </a:lnTo>
-                  <a:lnTo>
-                    <a:pt x="4225729" y="2998632"/>
-                  </a:lnTo>
-                  <a:lnTo>
-                    <a:pt x="4154106" y="2975058"/>
-                  </a:lnTo>
-                  <a:lnTo>
-                    <a:pt x="4082483" y="2950338"/>
-                  </a:lnTo>
-                  <a:lnTo>
-                    <a:pt x="4010861" y="2924417"/>
-                  </a:lnTo>
-                  <a:lnTo>
-                    <a:pt x="3939238" y="2897236"/>
-                  </a:lnTo>
-                  <a:lnTo>
-                    <a:pt x="3867616" y="2868734"/>
-                  </a:lnTo>
-                  <a:lnTo>
-                    <a:pt x="3795993" y="2838848"/>
-                  </a:lnTo>
-                  <a:lnTo>
-                    <a:pt x="3724371" y="2807509"/>
-                  </a:lnTo>
-                  <a:lnTo>
-                    <a:pt x="3652748" y="2774647"/>
-                  </a:lnTo>
-                  <a:lnTo>
-                    <a:pt x="3581126" y="2740188"/>
-                  </a:lnTo>
-                  <a:lnTo>
-                    <a:pt x="3509503" y="2704055"/>
-                  </a:lnTo>
-                  <a:lnTo>
-                    <a:pt x="3437881" y="2666165"/>
-                  </a:lnTo>
-                  <a:lnTo>
-                    <a:pt x="3366258" y="2638831"/>
-                  </a:lnTo>
-                  <a:lnTo>
-                    <a:pt x="3294636" y="2616123"/>
-                  </a:lnTo>
-                  <a:lnTo>
-                    <a:pt x="3223013" y="2592804"/>
-                  </a:lnTo>
-                  <a:lnTo>
-                    <a:pt x="3151391" y="2568859"/>
-                  </a:lnTo>
-                  <a:lnTo>
-                    <a:pt x="3079768" y="2544270"/>
-                  </a:lnTo>
-                  <a:lnTo>
-                    <a:pt x="3008146" y="2519020"/>
-                  </a:lnTo>
-                  <a:lnTo>
-                    <a:pt x="2936523" y="2493091"/>
-                  </a:lnTo>
-                  <a:lnTo>
-                    <a:pt x="2864901" y="2466466"/>
-                  </a:lnTo>
-                  <a:lnTo>
-                    <a:pt x="2793278" y="2439125"/>
-                  </a:lnTo>
-                  <a:lnTo>
-                    <a:pt x="2721655" y="2411049"/>
-                  </a:lnTo>
-                  <a:lnTo>
-                    <a:pt x="2650033" y="2382218"/>
-                  </a:lnTo>
-                  <a:lnTo>
-                    <a:pt x="2578410" y="2352613"/>
-                  </a:lnTo>
-                  <a:lnTo>
-                    <a:pt x="2506788" y="2322212"/>
-                  </a:lnTo>
-                  <a:lnTo>
-                    <a:pt x="2435165" y="2290994"/>
-                  </a:lnTo>
-                  <a:lnTo>
-                    <a:pt x="2363543" y="2258937"/>
-                  </a:lnTo>
-                  <a:lnTo>
-                    <a:pt x="2291920" y="2226018"/>
-                  </a:lnTo>
-                  <a:lnTo>
-                    <a:pt x="2220298" y="2192215"/>
-                  </a:lnTo>
-                  <a:lnTo>
-                    <a:pt x="2148675" y="2157503"/>
-                  </a:lnTo>
-                  <a:lnTo>
-                    <a:pt x="2077053" y="2121858"/>
-                  </a:lnTo>
-                  <a:lnTo>
-                    <a:pt x="2005430" y="2085255"/>
-                  </a:lnTo>
-                  <a:lnTo>
-                    <a:pt x="1933808" y="2047668"/>
-                  </a:lnTo>
-                  <a:lnTo>
-                    <a:pt x="1862185" y="2009071"/>
-                  </a:lnTo>
-                  <a:lnTo>
-                    <a:pt x="1790563" y="1969437"/>
-                  </a:lnTo>
-                  <a:lnTo>
-                    <a:pt x="1718940" y="1928738"/>
-                  </a:lnTo>
-                  <a:lnTo>
-                    <a:pt x="1647318" y="1886944"/>
-                  </a:lnTo>
-                  <a:lnTo>
-                    <a:pt x="1575695" y="1844028"/>
-                  </a:lnTo>
-                  <a:lnTo>
-                    <a:pt x="1504073" y="1799958"/>
-                  </a:lnTo>
-                  <a:lnTo>
-                    <a:pt x="1432450" y="1754703"/>
-                  </a:lnTo>
-                  <a:lnTo>
-                    <a:pt x="1360827" y="1708233"/>
-                  </a:lnTo>
-                  <a:lnTo>
-                    <a:pt x="1289205" y="1660513"/>
-                  </a:lnTo>
-                  <a:lnTo>
-                    <a:pt x="1217582" y="1611511"/>
-                  </a:lnTo>
-                  <a:lnTo>
-                    <a:pt x="1145960" y="1561191"/>
-                  </a:lnTo>
-                  <a:lnTo>
-                    <a:pt x="1074337" y="1509520"/>
-                  </a:lnTo>
-                  <a:lnTo>
-                    <a:pt x="1002715" y="1456459"/>
-                  </a:lnTo>
-                  <a:lnTo>
-                    <a:pt x="931092" y="1401973"/>
-                  </a:lnTo>
-                  <a:lnTo>
-                    <a:pt x="859470" y="1346022"/>
-                  </a:lnTo>
-                  <a:lnTo>
-                    <a:pt x="787847" y="1288567"/>
-                  </a:lnTo>
-                  <a:lnTo>
-                    <a:pt x="716225" y="1229568"/>
-                  </a:lnTo>
-                  <a:lnTo>
-                    <a:pt x="644602" y="1168983"/>
-                  </a:lnTo>
-                  <a:lnTo>
-                    <a:pt x="572980" y="1106770"/>
-                  </a:lnTo>
-                  <a:lnTo>
-                    <a:pt x="501357" y="1042885"/>
-                  </a:lnTo>
-                  <a:lnTo>
-                    <a:pt x="429735" y="977283"/>
-                  </a:lnTo>
-                  <a:lnTo>
-                    <a:pt x="358112" y="909918"/>
-                  </a:lnTo>
-                  <a:lnTo>
-                    <a:pt x="286490" y="840743"/>
-                  </a:lnTo>
-                  <a:lnTo>
-                    <a:pt x="214867" y="769708"/>
-                  </a:lnTo>
-                  <a:lnTo>
-                    <a:pt x="143245" y="696764"/>
-                  </a:lnTo>
-                  <a:lnTo>
-                    <a:pt x="71622" y="621859"/>
-                  </a:lnTo>
-                  <a:lnTo>
-                    <a:pt x="0" y="544941"/>
+                    <a:pt x="1289205" y="73965"/>
+                  </a:lnTo>
+                  <a:lnTo>
+                    <a:pt x="1360827" y="232479"/>
+                  </a:lnTo>
+                  <a:lnTo>
+                    <a:pt x="1432450" y="383624"/>
+                  </a:lnTo>
+                  <a:lnTo>
+                    <a:pt x="1504073" y="527743"/>
+                  </a:lnTo>
+                  <a:lnTo>
+                    <a:pt x="1575695" y="665161"/>
+                  </a:lnTo>
+                  <a:lnTo>
+                    <a:pt x="1647318" y="796192"/>
+                  </a:lnTo>
+                  <a:lnTo>
+                    <a:pt x="1718940" y="921131"/>
+                  </a:lnTo>
+                  <a:lnTo>
+                    <a:pt x="1790563" y="1040262"/>
+                  </a:lnTo>
+                  <a:lnTo>
+                    <a:pt x="1862185" y="1153855"/>
+                  </a:lnTo>
+                  <a:lnTo>
+                    <a:pt x="1933808" y="1262167"/>
+                  </a:lnTo>
+                  <a:lnTo>
+                    <a:pt x="2005430" y="1365444"/>
+                  </a:lnTo>
+                  <a:lnTo>
+                    <a:pt x="2077053" y="1463920"/>
+                  </a:lnTo>
+                  <a:lnTo>
+                    <a:pt x="2148675" y="1557817"/>
+                  </a:lnTo>
+                  <a:lnTo>
+                    <a:pt x="2220298" y="1647350"/>
+                  </a:lnTo>
+                  <a:lnTo>
+                    <a:pt x="2291920" y="1732721"/>
+                  </a:lnTo>
+                  <a:lnTo>
+                    <a:pt x="2363543" y="1814122"/>
+                  </a:lnTo>
+                  <a:lnTo>
+                    <a:pt x="2435165" y="1891740"/>
+                  </a:lnTo>
+                  <a:lnTo>
+                    <a:pt x="2506788" y="1965749"/>
+                  </a:lnTo>
+                  <a:lnTo>
+                    <a:pt x="2578410" y="2036318"/>
+                  </a:lnTo>
+                  <a:lnTo>
+                    <a:pt x="2650033" y="2103606"/>
+                  </a:lnTo>
+                  <a:lnTo>
+                    <a:pt x="2721655" y="2167766"/>
+                  </a:lnTo>
+                  <a:lnTo>
+                    <a:pt x="2793278" y="2228943"/>
+                  </a:lnTo>
+                  <a:lnTo>
+                    <a:pt x="2864901" y="2287277"/>
+                  </a:lnTo>
+                  <a:lnTo>
+                    <a:pt x="2936523" y="2342898"/>
+                  </a:lnTo>
+                  <a:lnTo>
+                    <a:pt x="3008146" y="2395934"/>
+                  </a:lnTo>
+                  <a:lnTo>
+                    <a:pt x="3079768" y="2446504"/>
+                  </a:lnTo>
+                  <a:lnTo>
+                    <a:pt x="3151391" y="2494724"/>
+                  </a:lnTo>
+                  <a:lnTo>
+                    <a:pt x="3223013" y="2540702"/>
+                  </a:lnTo>
+                  <a:lnTo>
+                    <a:pt x="3294636" y="2584542"/>
+                  </a:lnTo>
+                  <a:lnTo>
+                    <a:pt x="3366258" y="2626344"/>
+                  </a:lnTo>
+                  <a:lnTo>
+                    <a:pt x="3437881" y="2660977"/>
+                  </a:lnTo>
+                  <a:lnTo>
+                    <a:pt x="3509503" y="2682612"/>
+                  </a:lnTo>
+                  <a:lnTo>
+                    <a:pt x="3581126" y="2703679"/>
+                  </a:lnTo>
+                  <a:lnTo>
+                    <a:pt x="3652748" y="2724191"/>
+                  </a:lnTo>
+                  <a:lnTo>
+                    <a:pt x="3724371" y="2744165"/>
+                  </a:lnTo>
+                  <a:lnTo>
+                    <a:pt x="3795993" y="2763613"/>
+                  </a:lnTo>
+                  <a:lnTo>
+                    <a:pt x="3867616" y="2782549"/>
+                  </a:lnTo>
+                  <a:lnTo>
+                    <a:pt x="3939238" y="2800988"/>
+                  </a:lnTo>
+                  <a:lnTo>
+                    <a:pt x="4010861" y="2818941"/>
+                  </a:lnTo>
+                  <a:lnTo>
+                    <a:pt x="4082483" y="2836423"/>
+                  </a:lnTo>
+                  <a:lnTo>
+                    <a:pt x="4154106" y="2853445"/>
+                  </a:lnTo>
+                  <a:lnTo>
+                    <a:pt x="4225729" y="2870019"/>
+                  </a:lnTo>
+                  <a:lnTo>
+                    <a:pt x="4297351" y="2886158"/>
+                  </a:lnTo>
+                  <a:lnTo>
+                    <a:pt x="4368974" y="2901872"/>
+                  </a:lnTo>
+                  <a:lnTo>
+                    <a:pt x="4440596" y="2917173"/>
+                  </a:lnTo>
+                  <a:lnTo>
+                    <a:pt x="4512219" y="2932071"/>
+                  </a:lnTo>
+                  <a:lnTo>
+                    <a:pt x="4583841" y="2946578"/>
+                  </a:lnTo>
+                  <a:lnTo>
+                    <a:pt x="4655464" y="2960703"/>
+                  </a:lnTo>
+                  <a:lnTo>
+                    <a:pt x="4727086" y="2974457"/>
+                  </a:lnTo>
+                  <a:lnTo>
+                    <a:pt x="4798709" y="2987850"/>
+                  </a:lnTo>
+                  <a:lnTo>
+                    <a:pt x="4870331" y="3000890"/>
+                  </a:lnTo>
+                  <a:lnTo>
+                    <a:pt x="4941954" y="3013587"/>
+                  </a:lnTo>
+                  <a:lnTo>
+                    <a:pt x="5013576" y="3025950"/>
+                  </a:lnTo>
+                  <a:lnTo>
+                    <a:pt x="5085199" y="3037988"/>
+                  </a:lnTo>
+                  <a:lnTo>
+                    <a:pt x="5156821" y="3049710"/>
+                  </a:lnTo>
+                  <a:lnTo>
+                    <a:pt x="5228444" y="3061123"/>
+                  </a:lnTo>
+                  <a:lnTo>
+                    <a:pt x="5300066" y="3072236"/>
+                  </a:lnTo>
+                  <a:lnTo>
+                    <a:pt x="5371689" y="3083057"/>
+                  </a:lnTo>
+                  <a:lnTo>
+                    <a:pt x="5443311" y="3093594"/>
+                  </a:lnTo>
+                  <a:lnTo>
+                    <a:pt x="5514934" y="3103853"/>
+                  </a:lnTo>
+                  <a:lnTo>
+                    <a:pt x="5586557" y="3113843"/>
+                  </a:lnTo>
+                  <a:lnTo>
+                    <a:pt x="5658179" y="3123570"/>
+                  </a:lnTo>
+                  <a:lnTo>
+                    <a:pt x="5729802" y="3133041"/>
+                  </a:lnTo>
+                  <a:lnTo>
+                    <a:pt x="5801424" y="3142263"/>
+                  </a:lnTo>
+                  <a:lnTo>
+                    <a:pt x="5873047" y="3151243"/>
+                  </a:lnTo>
+                  <a:lnTo>
+                    <a:pt x="5944669" y="3159986"/>
+                  </a:lnTo>
+                  <a:lnTo>
+                    <a:pt x="6016292" y="3168500"/>
+                  </a:lnTo>
+                  <a:lnTo>
+                    <a:pt x="6087914" y="3176789"/>
+                  </a:lnTo>
+                  <a:lnTo>
+                    <a:pt x="6159537" y="3184861"/>
+                  </a:lnTo>
+                  <a:lnTo>
+                    <a:pt x="6231159" y="3192721"/>
+                  </a:lnTo>
+                  <a:lnTo>
+                    <a:pt x="6302782" y="3200373"/>
+                  </a:lnTo>
+                  <a:lnTo>
+                    <a:pt x="6374404" y="3207825"/>
+                  </a:lnTo>
+                  <a:lnTo>
+                    <a:pt x="6446027" y="3215081"/>
+                  </a:lnTo>
+                  <a:lnTo>
+                    <a:pt x="6517649" y="3222145"/>
+                  </a:lnTo>
+                  <a:lnTo>
+                    <a:pt x="6589272" y="3229024"/>
+                  </a:lnTo>
+                  <a:lnTo>
+                    <a:pt x="6660894" y="3235723"/>
+                  </a:lnTo>
+                  <a:lnTo>
+                    <a:pt x="6732517" y="3242245"/>
+                  </a:lnTo>
+                  <a:lnTo>
+                    <a:pt x="6804139" y="3248595"/>
+                  </a:lnTo>
+                  <a:lnTo>
+                    <a:pt x="6875762" y="3254779"/>
+                  </a:lnTo>
+                  <a:lnTo>
+                    <a:pt x="6947385" y="3260799"/>
+                  </a:lnTo>
+                  <a:lnTo>
+                    <a:pt x="7019007" y="3266662"/>
+                  </a:lnTo>
+                  <a:lnTo>
+                    <a:pt x="7090630" y="3272370"/>
+                  </a:lnTo>
+                  <a:lnTo>
+                    <a:pt x="7090630" y="3411612"/>
+                  </a:lnTo>
+                  <a:lnTo>
+                    <a:pt x="7019007" y="3408095"/>
+                  </a:lnTo>
+                  <a:lnTo>
+                    <a:pt x="6947385" y="3404406"/>
+                  </a:lnTo>
+                  <a:lnTo>
+                    <a:pt x="6875762" y="3400538"/>
+                  </a:lnTo>
+                  <a:lnTo>
+                    <a:pt x="6804139" y="3396482"/>
+                  </a:lnTo>
+                  <a:lnTo>
+                    <a:pt x="6732517" y="3392227"/>
+                  </a:lnTo>
+                  <a:lnTo>
+                    <a:pt x="6660894" y="3387765"/>
+                  </a:lnTo>
+                  <a:lnTo>
+                    <a:pt x="6589272" y="3383085"/>
+                  </a:lnTo>
+                  <a:lnTo>
+                    <a:pt x="6517649" y="3378178"/>
+                  </a:lnTo>
+                  <a:lnTo>
+                    <a:pt x="6446027" y="3373031"/>
+                  </a:lnTo>
+                  <a:lnTo>
+                    <a:pt x="6374404" y="3367633"/>
+                  </a:lnTo>
+                  <a:lnTo>
+                    <a:pt x="6302782" y="3361972"/>
+                  </a:lnTo>
+                  <a:lnTo>
+                    <a:pt x="6231159" y="3356035"/>
+                  </a:lnTo>
+                  <a:lnTo>
+                    <a:pt x="6159537" y="3349808"/>
+                  </a:lnTo>
+                  <a:lnTo>
+                    <a:pt x="6087914" y="3343278"/>
+                  </a:lnTo>
+                  <a:lnTo>
+                    <a:pt x="6016292" y="3336430"/>
+                  </a:lnTo>
+                  <a:lnTo>
+                    <a:pt x="5944669" y="3329247"/>
+                  </a:lnTo>
+                  <a:lnTo>
+                    <a:pt x="5873047" y="3321715"/>
+                  </a:lnTo>
+                  <a:lnTo>
+                    <a:pt x="5801424" y="3313815"/>
+                  </a:lnTo>
+                  <a:lnTo>
+                    <a:pt x="5729802" y="3305530"/>
+                  </a:lnTo>
+                  <a:lnTo>
+                    <a:pt x="5658179" y="3296841"/>
+                  </a:lnTo>
+                  <a:lnTo>
+                    <a:pt x="5586557" y="3287729"/>
+                  </a:lnTo>
+                  <a:lnTo>
+                    <a:pt x="5514934" y="3278172"/>
+                  </a:lnTo>
+                  <a:lnTo>
+                    <a:pt x="5443311" y="3268149"/>
+                  </a:lnTo>
+                  <a:lnTo>
+                    <a:pt x="5371689" y="3257638"/>
+                  </a:lnTo>
+                  <a:lnTo>
+                    <a:pt x="5300066" y="3246614"/>
+                  </a:lnTo>
+                  <a:lnTo>
+                    <a:pt x="5228444" y="3235053"/>
+                  </a:lnTo>
+                  <a:lnTo>
+                    <a:pt x="5156821" y="3222928"/>
+                  </a:lnTo>
+                  <a:lnTo>
+                    <a:pt x="5085199" y="3210212"/>
+                  </a:lnTo>
+                  <a:lnTo>
+                    <a:pt x="5013576" y="3196876"/>
+                  </a:lnTo>
+                  <a:lnTo>
+                    <a:pt x="4941954" y="3182890"/>
+                  </a:lnTo>
+                  <a:lnTo>
+                    <a:pt x="4870331" y="3168222"/>
+                  </a:lnTo>
+                  <a:lnTo>
+                    <a:pt x="4798709" y="3152838"/>
+                  </a:lnTo>
+                  <a:lnTo>
+                    <a:pt x="4727086" y="3136705"/>
+                  </a:lnTo>
+                  <a:lnTo>
+                    <a:pt x="4655464" y="3119785"/>
+                  </a:lnTo>
+                  <a:lnTo>
+                    <a:pt x="4583841" y="3102040"/>
+                  </a:lnTo>
+                  <a:lnTo>
+                    <a:pt x="4512219" y="3083430"/>
+                  </a:lnTo>
+                  <a:lnTo>
+                    <a:pt x="4440596" y="3063913"/>
+                  </a:lnTo>
+                  <a:lnTo>
+                    <a:pt x="4368974" y="3043444"/>
+                  </a:lnTo>
+                  <a:lnTo>
+                    <a:pt x="4297351" y="3021978"/>
+                  </a:lnTo>
+                  <a:lnTo>
+                    <a:pt x="4225729" y="2999464"/>
+                  </a:lnTo>
+                  <a:lnTo>
+                    <a:pt x="4154106" y="2975853"/>
+                  </a:lnTo>
+                  <a:lnTo>
+                    <a:pt x="4082483" y="2951091"/>
+                  </a:lnTo>
+                  <a:lnTo>
+                    <a:pt x="4010861" y="2925122"/>
+                  </a:lnTo>
+                  <a:lnTo>
+                    <a:pt x="3939238" y="2897886"/>
+                  </a:lnTo>
+                  <a:lnTo>
+                    <a:pt x="3867616" y="2869323"/>
+                  </a:lnTo>
+                  <a:lnTo>
+                    <a:pt x="3795993" y="2839367"/>
+                  </a:lnTo>
+                  <a:lnTo>
+                    <a:pt x="3724371" y="2807951"/>
+                  </a:lnTo>
+                  <a:lnTo>
+                    <a:pt x="3652748" y="2775003"/>
+                  </a:lnTo>
+                  <a:lnTo>
+                    <a:pt x="3581126" y="2740448"/>
+                  </a:lnTo>
+                  <a:lnTo>
+                    <a:pt x="3509503" y="2704209"/>
+                  </a:lnTo>
+                  <a:lnTo>
+                    <a:pt x="3437881" y="2666203"/>
+                  </a:lnTo>
+                  <a:lnTo>
+                    <a:pt x="3366258" y="2638757"/>
+                  </a:lnTo>
+                  <a:lnTo>
+                    <a:pt x="3294636" y="2615937"/>
+                  </a:lnTo>
+                  <a:lnTo>
+                    <a:pt x="3223013" y="2592501"/>
+                  </a:lnTo>
+                  <a:lnTo>
+                    <a:pt x="3151391" y="2568432"/>
+                  </a:lnTo>
+                  <a:lnTo>
+                    <a:pt x="3079768" y="2543713"/>
+                  </a:lnTo>
+                  <a:lnTo>
+                    <a:pt x="3008146" y="2518327"/>
+                  </a:lnTo>
+                  <a:lnTo>
+                    <a:pt x="2936523" y="2492255"/>
+                  </a:lnTo>
+                  <a:lnTo>
+                    <a:pt x="2864901" y="2465478"/>
+                  </a:lnTo>
+                  <a:lnTo>
+                    <a:pt x="2793278" y="2437979"/>
+                  </a:lnTo>
+                  <a:lnTo>
+                    <a:pt x="2721655" y="2409737"/>
+                  </a:lnTo>
+                  <a:lnTo>
+                    <a:pt x="2650033" y="2380732"/>
+                  </a:lnTo>
+                  <a:lnTo>
+                    <a:pt x="2578410" y="2350944"/>
+                  </a:lnTo>
+                  <a:lnTo>
+                    <a:pt x="2506788" y="2320352"/>
+                  </a:lnTo>
+                  <a:lnTo>
+                    <a:pt x="2435165" y="2288933"/>
+                  </a:lnTo>
+                  <a:lnTo>
+                    <a:pt x="2363543" y="2256666"/>
+                  </a:lnTo>
+                  <a:lnTo>
+                    <a:pt x="2291920" y="2223527"/>
+                  </a:lnTo>
+                  <a:lnTo>
+                    <a:pt x="2220298" y="2189494"/>
+                  </a:lnTo>
+                  <a:lnTo>
+                    <a:pt x="2148675" y="2154541"/>
+                  </a:lnTo>
+                  <a:lnTo>
+                    <a:pt x="2077053" y="2118645"/>
+                  </a:lnTo>
+                  <a:lnTo>
+                    <a:pt x="2005430" y="2081779"/>
+                  </a:lnTo>
+                  <a:lnTo>
+                    <a:pt x="1933808" y="2043917"/>
+                  </a:lnTo>
+                  <a:lnTo>
+                    <a:pt x="1862185" y="2005033"/>
+                  </a:lnTo>
+                  <a:lnTo>
+                    <a:pt x="1790563" y="1965099"/>
+                  </a:lnTo>
+                  <a:lnTo>
+                    <a:pt x="1718940" y="1924086"/>
+                  </a:lnTo>
+                  <a:lnTo>
+                    <a:pt x="1647318" y="1881966"/>
+                  </a:lnTo>
+                  <a:lnTo>
+                    <a:pt x="1575695" y="1838708"/>
+                  </a:lnTo>
+                  <a:lnTo>
+                    <a:pt x="1504073" y="1794282"/>
+                  </a:lnTo>
+                  <a:lnTo>
+                    <a:pt x="1432450" y="1748657"/>
+                  </a:lnTo>
+                  <a:lnTo>
+                    <a:pt x="1360827" y="1701799"/>
+                  </a:lnTo>
+                  <a:lnTo>
+                    <a:pt x="1289205" y="1653675"/>
+                  </a:lnTo>
+                  <a:lnTo>
+                    <a:pt x="1217582" y="1604252"/>
+                  </a:lnTo>
+                  <a:lnTo>
+                    <a:pt x="1145960" y="1553495"/>
+                  </a:lnTo>
+                  <a:lnTo>
+                    <a:pt x="1074337" y="1501366"/>
+                  </a:lnTo>
+                  <a:lnTo>
+                    <a:pt x="1002715" y="1447830"/>
+                  </a:lnTo>
+                  <a:lnTo>
+                    <a:pt x="931092" y="1392848"/>
+                  </a:lnTo>
+                  <a:lnTo>
+                    <a:pt x="859470" y="1336381"/>
+                  </a:lnTo>
+                  <a:lnTo>
+                    <a:pt x="787847" y="1278389"/>
+                  </a:lnTo>
+                  <a:lnTo>
+                    <a:pt x="716225" y="1218831"/>
+                  </a:lnTo>
+                  <a:lnTo>
+                    <a:pt x="644602" y="1157665"/>
+                  </a:lnTo>
+                  <a:lnTo>
+                    <a:pt x="572980" y="1094847"/>
+                  </a:lnTo>
+                  <a:lnTo>
+                    <a:pt x="501357" y="1030332"/>
+                  </a:lnTo>
+                  <a:lnTo>
+                    <a:pt x="429735" y="964075"/>
+                  </a:lnTo>
+                  <a:lnTo>
+                    <a:pt x="358112" y="896029"/>
+                  </a:lnTo>
+                  <a:lnTo>
+                    <a:pt x="286490" y="826145"/>
+                  </a:lnTo>
+                  <a:lnTo>
+                    <a:pt x="214867" y="754374"/>
+                  </a:lnTo>
+                  <a:lnTo>
+                    <a:pt x="143245" y="680664"/>
+                  </a:lnTo>
+                  <a:lnTo>
+                    <a:pt x="71622" y="604964"/>
+                  </a:lnTo>
+                  <a:lnTo>
+                    <a:pt x="0" y="527220"/>
                   </a:lnTo>
                   <a:close/>
                 </a:path>
@@ -4012,261 +4012,261 @@
           </p:nvSpPr>
           <p:spPr>
             <a:xfrm>
-              <a:off x="2422474" y="2073503"/>
-              <a:ext cx="5840205" cy="3270999"/>
+              <a:off x="2429388" y="2073503"/>
+              <a:ext cx="5833291" cy="3272370"/>
             </a:xfrm>
             <a:custGeom>
               <a:avLst/>
               <a:pathLst>
-                <a:path w="5840205" h="3270999">
+                <a:path w="5833291" h="3272370">
                   <a:moveTo>
                     <a:pt x="0" y="0"/>
                   </a:moveTo>
                   <a:lnTo>
-                    <a:pt x="38780" y="89315"/>
-                  </a:lnTo>
-                  <a:lnTo>
-                    <a:pt x="110403" y="246624"/>
-                  </a:lnTo>
-                  <a:lnTo>
-                    <a:pt x="182025" y="396642"/>
-                  </a:lnTo>
-                  <a:lnTo>
-                    <a:pt x="253648" y="539708"/>
-                  </a:lnTo>
-                  <a:lnTo>
-                    <a:pt x="325270" y="676144"/>
-                  </a:lnTo>
-                  <a:lnTo>
-                    <a:pt x="396893" y="806258"/>
-                  </a:lnTo>
-                  <a:lnTo>
-                    <a:pt x="468515" y="930341"/>
-                  </a:lnTo>
-                  <a:lnTo>
-                    <a:pt x="540138" y="1048674"/>
-                  </a:lnTo>
-                  <a:lnTo>
-                    <a:pt x="611760" y="1161523"/>
-                  </a:lnTo>
-                  <a:lnTo>
-                    <a:pt x="683383" y="1269142"/>
-                  </a:lnTo>
-                  <a:lnTo>
-                    <a:pt x="755006" y="1371774"/>
-                  </a:lnTo>
-                  <a:lnTo>
-                    <a:pt x="826628" y="1469649"/>
-                  </a:lnTo>
-                  <a:lnTo>
-                    <a:pt x="898251" y="1562989"/>
-                  </a:lnTo>
-                  <a:lnTo>
-                    <a:pt x="969873" y="1652003"/>
-                  </a:lnTo>
-                  <a:lnTo>
-                    <a:pt x="1041496" y="1736892"/>
-                  </a:lnTo>
-                  <a:lnTo>
-                    <a:pt x="1113118" y="1817846"/>
-                  </a:lnTo>
-                  <a:lnTo>
-                    <a:pt x="1184741" y="1895049"/>
-                  </a:lnTo>
-                  <a:lnTo>
-                    <a:pt x="1256363" y="1968675"/>
-                  </a:lnTo>
-                  <a:lnTo>
-                    <a:pt x="1327986" y="2038888"/>
-                  </a:lnTo>
-                  <a:lnTo>
-                    <a:pt x="1399608" y="2105847"/>
-                  </a:lnTo>
-                  <a:lnTo>
-                    <a:pt x="1471231" y="2169703"/>
-                  </a:lnTo>
-                  <a:lnTo>
-                    <a:pt x="1542853" y="2230600"/>
-                  </a:lnTo>
-                  <a:lnTo>
-                    <a:pt x="1614476" y="2288675"/>
-                  </a:lnTo>
-                  <a:lnTo>
-                    <a:pt x="1686098" y="2344058"/>
-                  </a:lnTo>
-                  <a:lnTo>
-                    <a:pt x="1757721" y="2396875"/>
-                  </a:lnTo>
-                  <a:lnTo>
-                    <a:pt x="1829343" y="2447244"/>
-                  </a:lnTo>
-                  <a:lnTo>
-                    <a:pt x="1900966" y="2495279"/>
-                  </a:lnTo>
-                  <a:lnTo>
-                    <a:pt x="1972588" y="2541088"/>
-                  </a:lnTo>
-                  <a:lnTo>
-                    <a:pt x="2044211" y="2584773"/>
-                  </a:lnTo>
-                  <a:lnTo>
-                    <a:pt x="2115834" y="2626435"/>
-                  </a:lnTo>
-                  <a:lnTo>
-                    <a:pt x="2187456" y="2660945"/>
-                  </a:lnTo>
-                  <a:lnTo>
-                    <a:pt x="2259079" y="2682481"/>
-                  </a:lnTo>
-                  <a:lnTo>
-                    <a:pt x="2330701" y="2703452"/>
-                  </a:lnTo>
-                  <a:lnTo>
-                    <a:pt x="2402324" y="2723875"/>
-                  </a:lnTo>
-                  <a:lnTo>
-                    <a:pt x="2473946" y="2743763"/>
-                  </a:lnTo>
-                  <a:lnTo>
-                    <a:pt x="2545569" y="2763131"/>
-                  </a:lnTo>
-                  <a:lnTo>
-                    <a:pt x="2617191" y="2781992"/>
-                  </a:lnTo>
-                  <a:lnTo>
-                    <a:pt x="2688814" y="2800359"/>
-                  </a:lnTo>
-                  <a:lnTo>
-                    <a:pt x="2760436" y="2818245"/>
-                  </a:lnTo>
-                  <a:lnTo>
-                    <a:pt x="2832059" y="2835663"/>
-                  </a:lnTo>
-                  <a:lnTo>
-                    <a:pt x="2903681" y="2852626"/>
-                  </a:lnTo>
-                  <a:lnTo>
-                    <a:pt x="2975304" y="2869144"/>
-                  </a:lnTo>
-                  <a:lnTo>
-                    <a:pt x="3046926" y="2885230"/>
-                  </a:lnTo>
-                  <a:lnTo>
-                    <a:pt x="3118549" y="2900895"/>
-                  </a:lnTo>
-                  <a:lnTo>
-                    <a:pt x="3190171" y="2916150"/>
-                  </a:lnTo>
-                  <a:lnTo>
-                    <a:pt x="3261794" y="2931006"/>
-                  </a:lnTo>
-                  <a:lnTo>
-                    <a:pt x="3333416" y="2945473"/>
-                  </a:lnTo>
-                  <a:lnTo>
-                    <a:pt x="3405039" y="2959561"/>
-                  </a:lnTo>
-                  <a:lnTo>
-                    <a:pt x="3476662" y="2973281"/>
-                  </a:lnTo>
-                  <a:lnTo>
-                    <a:pt x="3548284" y="2986641"/>
-                  </a:lnTo>
-                  <a:lnTo>
-                    <a:pt x="3619907" y="2999652"/>
-                  </a:lnTo>
-                  <a:lnTo>
-                    <a:pt x="3691529" y="3012322"/>
-                  </a:lnTo>
-                  <a:lnTo>
-                    <a:pt x="3763152" y="3024661"/>
-                  </a:lnTo>
-                  <a:lnTo>
-                    <a:pt x="3834774" y="3036677"/>
-                  </a:lnTo>
-                  <a:lnTo>
-                    <a:pt x="3906397" y="3048378"/>
-                  </a:lnTo>
-                  <a:lnTo>
-                    <a:pt x="3978019" y="3059773"/>
-                  </a:lnTo>
-                  <a:lnTo>
-                    <a:pt x="4049642" y="3070870"/>
-                  </a:lnTo>
-                  <a:lnTo>
-                    <a:pt x="4121264" y="3081676"/>
-                  </a:lnTo>
-                  <a:lnTo>
-                    <a:pt x="4192887" y="3092199"/>
-                  </a:lnTo>
-                  <a:lnTo>
-                    <a:pt x="4264509" y="3102447"/>
-                  </a:lnTo>
-                  <a:lnTo>
-                    <a:pt x="4336132" y="3112427"/>
-                  </a:lnTo>
-                  <a:lnTo>
-                    <a:pt x="4407754" y="3122146"/>
-                  </a:lnTo>
-                  <a:lnTo>
-                    <a:pt x="4479377" y="3131610"/>
-                  </a:lnTo>
-                  <a:lnTo>
-                    <a:pt x="4550999" y="3140827"/>
-                  </a:lnTo>
-                  <a:lnTo>
-                    <a:pt x="4622622" y="3149802"/>
-                  </a:lnTo>
-                  <a:lnTo>
-                    <a:pt x="4694244" y="3158542"/>
-                  </a:lnTo>
-                  <a:lnTo>
-                    <a:pt x="4765867" y="3167054"/>
-                  </a:lnTo>
-                  <a:lnTo>
-                    <a:pt x="4837490" y="3175343"/>
-                  </a:lnTo>
-                  <a:lnTo>
-                    <a:pt x="4909112" y="3183415"/>
-                  </a:lnTo>
-                  <a:lnTo>
-                    <a:pt x="4980735" y="3191275"/>
-                  </a:lnTo>
-                  <a:lnTo>
-                    <a:pt x="5052357" y="3198930"/>
-                  </a:lnTo>
-                  <a:lnTo>
-                    <a:pt x="5123980" y="3206385"/>
-                  </a:lnTo>
-                  <a:lnTo>
-                    <a:pt x="5195602" y="3213644"/>
-                  </a:lnTo>
-                  <a:lnTo>
-                    <a:pt x="5267225" y="3220713"/>
-                  </a:lnTo>
-                  <a:lnTo>
-                    <a:pt x="5338847" y="3227598"/>
-                  </a:lnTo>
-                  <a:lnTo>
-                    <a:pt x="5410470" y="3234302"/>
-                  </a:lnTo>
-                  <a:lnTo>
-                    <a:pt x="5482092" y="3240831"/>
-                  </a:lnTo>
-                  <a:lnTo>
-                    <a:pt x="5553715" y="3247189"/>
-                  </a:lnTo>
-                  <a:lnTo>
-                    <a:pt x="5625337" y="3253380"/>
-                  </a:lnTo>
-                  <a:lnTo>
-                    <a:pt x="5696960" y="3259410"/>
-                  </a:lnTo>
-                  <a:lnTo>
-                    <a:pt x="5768582" y="3265281"/>
-                  </a:lnTo>
-                  <a:lnTo>
-                    <a:pt x="5840205" y="3270999"/>
+                    <a:pt x="31866" y="73965"/>
+                  </a:lnTo>
+                  <a:lnTo>
+                    <a:pt x="103489" y="232479"/>
+                  </a:lnTo>
+                  <a:lnTo>
+                    <a:pt x="175111" y="383624"/>
+                  </a:lnTo>
+                  <a:lnTo>
+                    <a:pt x="246734" y="527743"/>
+                  </a:lnTo>
+                  <a:lnTo>
+                    <a:pt x="318356" y="665161"/>
+                  </a:lnTo>
+                  <a:lnTo>
+                    <a:pt x="389979" y="796192"/>
+                  </a:lnTo>
+                  <a:lnTo>
+                    <a:pt x="461601" y="921131"/>
+                  </a:lnTo>
+                  <a:lnTo>
+                    <a:pt x="533224" y="1040262"/>
+                  </a:lnTo>
+                  <a:lnTo>
+                    <a:pt x="604846" y="1153855"/>
+                  </a:lnTo>
+                  <a:lnTo>
+                    <a:pt x="676469" y="1262167"/>
+                  </a:lnTo>
+                  <a:lnTo>
+                    <a:pt x="748091" y="1365444"/>
+                  </a:lnTo>
+                  <a:lnTo>
+                    <a:pt x="819714" y="1463920"/>
+                  </a:lnTo>
+                  <a:lnTo>
+                    <a:pt x="891336" y="1557817"/>
+                  </a:lnTo>
+                  <a:lnTo>
+                    <a:pt x="962959" y="1647350"/>
+                  </a:lnTo>
+                  <a:lnTo>
+                    <a:pt x="1034581" y="1732721"/>
+                  </a:lnTo>
+                  <a:lnTo>
+                    <a:pt x="1106204" y="1814122"/>
+                  </a:lnTo>
+                  <a:lnTo>
+                    <a:pt x="1177827" y="1891740"/>
+                  </a:lnTo>
+                  <a:lnTo>
+                    <a:pt x="1249449" y="1965749"/>
+                  </a:lnTo>
+                  <a:lnTo>
+                    <a:pt x="1321072" y="2036318"/>
+                  </a:lnTo>
+                  <a:lnTo>
+                    <a:pt x="1392694" y="2103606"/>
+                  </a:lnTo>
+                  <a:lnTo>
+                    <a:pt x="1464317" y="2167766"/>
+                  </a:lnTo>
+                  <a:lnTo>
+                    <a:pt x="1535939" y="2228943"/>
+                  </a:lnTo>
+                  <a:lnTo>
+                    <a:pt x="1607562" y="2287277"/>
+                  </a:lnTo>
+                  <a:lnTo>
+                    <a:pt x="1679184" y="2342898"/>
+                  </a:lnTo>
+                  <a:lnTo>
+                    <a:pt x="1750807" y="2395934"/>
+                  </a:lnTo>
+                  <a:lnTo>
+                    <a:pt x="1822429" y="2446504"/>
+                  </a:lnTo>
+                  <a:lnTo>
+                    <a:pt x="1894052" y="2494724"/>
+                  </a:lnTo>
+                  <a:lnTo>
+                    <a:pt x="1965674" y="2540702"/>
+                  </a:lnTo>
+                  <a:lnTo>
+                    <a:pt x="2037297" y="2584542"/>
+                  </a:lnTo>
+                  <a:lnTo>
+                    <a:pt x="2108919" y="2626344"/>
+                  </a:lnTo>
+                  <a:lnTo>
+                    <a:pt x="2180542" y="2660977"/>
+                  </a:lnTo>
+                  <a:lnTo>
+                    <a:pt x="2252164" y="2682612"/>
+                  </a:lnTo>
+                  <a:lnTo>
+                    <a:pt x="2323787" y="2703679"/>
+                  </a:lnTo>
+                  <a:lnTo>
+                    <a:pt x="2395409" y="2724191"/>
+                  </a:lnTo>
+                  <a:lnTo>
+                    <a:pt x="2467032" y="2744165"/>
+                  </a:lnTo>
+                  <a:lnTo>
+                    <a:pt x="2538655" y="2763613"/>
+                  </a:lnTo>
+                  <a:lnTo>
+                    <a:pt x="2610277" y="2782549"/>
+                  </a:lnTo>
+                  <a:lnTo>
+                    <a:pt x="2681900" y="2800988"/>
+                  </a:lnTo>
+                  <a:lnTo>
+                    <a:pt x="2753522" y="2818941"/>
+                  </a:lnTo>
+                  <a:lnTo>
+                    <a:pt x="2825145" y="2836423"/>
+                  </a:lnTo>
+                  <a:lnTo>
+                    <a:pt x="2896767" y="2853445"/>
+                  </a:lnTo>
+                  <a:lnTo>
+                    <a:pt x="2968390" y="2870019"/>
+                  </a:lnTo>
+                  <a:lnTo>
+                    <a:pt x="3040012" y="2886158"/>
+                  </a:lnTo>
+                  <a:lnTo>
+                    <a:pt x="3111635" y="2901872"/>
+                  </a:lnTo>
+                  <a:lnTo>
+                    <a:pt x="3183257" y="2917173"/>
+                  </a:lnTo>
+                  <a:lnTo>
+                    <a:pt x="3254880" y="2932071"/>
+                  </a:lnTo>
+                  <a:lnTo>
+                    <a:pt x="3326502" y="2946578"/>
+                  </a:lnTo>
+                  <a:lnTo>
+                    <a:pt x="3398125" y="2960703"/>
+                  </a:lnTo>
+                  <a:lnTo>
+                    <a:pt x="3469747" y="2974457"/>
+                  </a:lnTo>
+                  <a:lnTo>
+                    <a:pt x="3541370" y="2987850"/>
+                  </a:lnTo>
+                  <a:lnTo>
+                    <a:pt x="3612992" y="3000890"/>
+                  </a:lnTo>
+                  <a:lnTo>
+                    <a:pt x="3684615" y="3013587"/>
+                  </a:lnTo>
+                  <a:lnTo>
+                    <a:pt x="3756237" y="3025950"/>
+                  </a:lnTo>
+                  <a:lnTo>
+                    <a:pt x="3827860" y="3037988"/>
+                  </a:lnTo>
+                  <a:lnTo>
+                    <a:pt x="3899483" y="3049710"/>
+                  </a:lnTo>
+                  <a:lnTo>
+                    <a:pt x="3971105" y="3061123"/>
+                  </a:lnTo>
+                  <a:lnTo>
+                    <a:pt x="4042728" y="3072236"/>
+                  </a:lnTo>
+                  <a:lnTo>
+                    <a:pt x="4114350" y="3083057"/>
+                  </a:lnTo>
+                  <a:lnTo>
+                    <a:pt x="4185973" y="3093594"/>
+                  </a:lnTo>
+                  <a:lnTo>
+                    <a:pt x="4257595" y="3103853"/>
+                  </a:lnTo>
+                  <a:lnTo>
+                    <a:pt x="4329218" y="3113843"/>
+                  </a:lnTo>
+                  <a:lnTo>
+                    <a:pt x="4400840" y="3123570"/>
+                  </a:lnTo>
+                  <a:lnTo>
+                    <a:pt x="4472463" y="3133041"/>
+                  </a:lnTo>
+                  <a:lnTo>
+                    <a:pt x="4544085" y="3142263"/>
+                  </a:lnTo>
+                  <a:lnTo>
+                    <a:pt x="4615708" y="3151243"/>
+                  </a:lnTo>
+                  <a:lnTo>
+                    <a:pt x="4687330" y="3159986"/>
+                  </a:lnTo>
+                  <a:lnTo>
+                    <a:pt x="4758953" y="3168500"/>
+                  </a:lnTo>
+                  <a:lnTo>
+                    <a:pt x="4830575" y="3176789"/>
+                  </a:lnTo>
+                  <a:lnTo>
+                    <a:pt x="4902198" y="3184861"/>
+                  </a:lnTo>
+                  <a:lnTo>
+                    <a:pt x="4973820" y="3192721"/>
+                  </a:lnTo>
+                  <a:lnTo>
+                    <a:pt x="5045443" y="3200373"/>
+                  </a:lnTo>
+                  <a:lnTo>
+                    <a:pt x="5117065" y="3207825"/>
+                  </a:lnTo>
+                  <a:lnTo>
+                    <a:pt x="5188688" y="3215081"/>
+                  </a:lnTo>
+                  <a:lnTo>
+                    <a:pt x="5260311" y="3222145"/>
+                  </a:lnTo>
+                  <a:lnTo>
+                    <a:pt x="5331933" y="3229024"/>
+                  </a:lnTo>
+                  <a:lnTo>
+                    <a:pt x="5403556" y="3235723"/>
+                  </a:lnTo>
+                  <a:lnTo>
+                    <a:pt x="5475178" y="3242245"/>
+                  </a:lnTo>
+                  <a:lnTo>
+                    <a:pt x="5546801" y="3248595"/>
+                  </a:lnTo>
+                  <a:lnTo>
+                    <a:pt x="5618423" y="3254779"/>
+                  </a:lnTo>
+                  <a:lnTo>
+                    <a:pt x="5690046" y="3260799"/>
+                  </a:lnTo>
+                  <a:lnTo>
+                    <a:pt x="5761668" y="3266662"/>
+                  </a:lnTo>
+                  <a:lnTo>
+                    <a:pt x="5833291" y="3272370"/>
                   </a:lnTo>
                 </a:path>
               </a:pathLst>
@@ -4286,309 +4286,309 @@
           </p:nvSpPr>
           <p:spPr>
             <a:xfrm>
-              <a:off x="1172049" y="2618444"/>
-              <a:ext cx="7090630" cy="2866105"/>
+              <a:off x="1172049" y="2600723"/>
+              <a:ext cx="7090630" cy="2884392"/>
             </a:xfrm>
             <a:custGeom>
               <a:avLst/>
               <a:pathLst>
-                <a:path w="7090630" h="2866105">
+                <a:path w="7090630" h="2884392">
                   <a:moveTo>
-                    <a:pt x="7090630" y="2866105"/>
+                    <a:pt x="7090630" y="2884392"/>
                   </a:moveTo>
                   <a:lnTo>
-                    <a:pt x="7019007" y="2862573"/>
-                  </a:lnTo>
-                  <a:lnTo>
-                    <a:pt x="6947385" y="2858868"/>
-                  </a:lnTo>
-                  <a:lnTo>
-                    <a:pt x="6875762" y="2854984"/>
-                  </a:lnTo>
-                  <a:lnTo>
-                    <a:pt x="6804139" y="2850910"/>
-                  </a:lnTo>
-                  <a:lnTo>
-                    <a:pt x="6732517" y="2846639"/>
-                  </a:lnTo>
-                  <a:lnTo>
-                    <a:pt x="6660894" y="2842160"/>
-                  </a:lnTo>
-                  <a:lnTo>
-                    <a:pt x="6589272" y="2837464"/>
-                  </a:lnTo>
-                  <a:lnTo>
-                    <a:pt x="6517649" y="2832539"/>
-                  </a:lnTo>
-                  <a:lnTo>
-                    <a:pt x="6446027" y="2827375"/>
-                  </a:lnTo>
-                  <a:lnTo>
-                    <a:pt x="6374404" y="2821960"/>
-                  </a:lnTo>
-                  <a:lnTo>
-                    <a:pt x="6302782" y="2816282"/>
-                  </a:lnTo>
-                  <a:lnTo>
-                    <a:pt x="6231159" y="2810328"/>
-                  </a:lnTo>
-                  <a:lnTo>
-                    <a:pt x="6159537" y="2804085"/>
-                  </a:lnTo>
-                  <a:lnTo>
-                    <a:pt x="6087914" y="2797538"/>
-                  </a:lnTo>
-                  <a:lnTo>
-                    <a:pt x="6016292" y="2790673"/>
-                  </a:lnTo>
-                  <a:lnTo>
-                    <a:pt x="5944669" y="2783475"/>
-                  </a:lnTo>
-                  <a:lnTo>
-                    <a:pt x="5873047" y="2775926"/>
-                  </a:lnTo>
-                  <a:lnTo>
-                    <a:pt x="5801424" y="2768011"/>
-                  </a:lnTo>
-                  <a:lnTo>
-                    <a:pt x="5729802" y="2759711"/>
-                  </a:lnTo>
-                  <a:lnTo>
-                    <a:pt x="5658179" y="2751008"/>
-                  </a:lnTo>
-                  <a:lnTo>
-                    <a:pt x="5586557" y="2741882"/>
-                  </a:lnTo>
-                  <a:lnTo>
-                    <a:pt x="5514934" y="2732313"/>
-                  </a:lnTo>
-                  <a:lnTo>
-                    <a:pt x="5443311" y="2722278"/>
-                  </a:lnTo>
-                  <a:lnTo>
-                    <a:pt x="5371689" y="2711756"/>
-                  </a:lnTo>
-                  <a:lnTo>
-                    <a:pt x="5300066" y="2700723"/>
-                  </a:lnTo>
-                  <a:lnTo>
-                    <a:pt x="5228444" y="2689153"/>
-                  </a:lnTo>
-                  <a:lnTo>
-                    <a:pt x="5156821" y="2677021"/>
-                  </a:lnTo>
-                  <a:lnTo>
-                    <a:pt x="5085199" y="2664300"/>
-                  </a:lnTo>
-                  <a:lnTo>
-                    <a:pt x="5013576" y="2650960"/>
-                  </a:lnTo>
-                  <a:lnTo>
-                    <a:pt x="4941954" y="2636972"/>
-                  </a:lnTo>
-                  <a:lnTo>
-                    <a:pt x="4870331" y="2622305"/>
-                  </a:lnTo>
-                  <a:lnTo>
-                    <a:pt x="4798709" y="2606924"/>
-                  </a:lnTo>
-                  <a:lnTo>
-                    <a:pt x="4727086" y="2590797"/>
-                  </a:lnTo>
-                  <a:lnTo>
-                    <a:pt x="4655464" y="2573885"/>
-                  </a:lnTo>
-                  <a:lnTo>
-                    <a:pt x="4583841" y="2556152"/>
-                  </a:lnTo>
-                  <a:lnTo>
-                    <a:pt x="4512219" y="2537557"/>
-                  </a:lnTo>
-                  <a:lnTo>
-                    <a:pt x="4440596" y="2518058"/>
-                  </a:lnTo>
-                  <a:lnTo>
-                    <a:pt x="4368974" y="2497612"/>
-                  </a:lnTo>
-                  <a:lnTo>
-                    <a:pt x="4297351" y="2476172"/>
-                  </a:lnTo>
-                  <a:lnTo>
-                    <a:pt x="4225729" y="2453690"/>
-                  </a:lnTo>
-                  <a:lnTo>
-                    <a:pt x="4154106" y="2430116"/>
-                  </a:lnTo>
-                  <a:lnTo>
-                    <a:pt x="4082483" y="2405396"/>
-                  </a:lnTo>
-                  <a:lnTo>
-                    <a:pt x="4010861" y="2379475"/>
-                  </a:lnTo>
-                  <a:lnTo>
-                    <a:pt x="3939238" y="2352294"/>
-                  </a:lnTo>
-                  <a:lnTo>
-                    <a:pt x="3867616" y="2323793"/>
-                  </a:lnTo>
-                  <a:lnTo>
-                    <a:pt x="3795993" y="2293906"/>
-                  </a:lnTo>
-                  <a:lnTo>
-                    <a:pt x="3724371" y="2262567"/>
-                  </a:lnTo>
-                  <a:lnTo>
-                    <a:pt x="3652748" y="2229705"/>
-                  </a:lnTo>
-                  <a:lnTo>
-                    <a:pt x="3581126" y="2195246"/>
-                  </a:lnTo>
-                  <a:lnTo>
-                    <a:pt x="3509503" y="2159113"/>
-                  </a:lnTo>
-                  <a:lnTo>
-                    <a:pt x="3437881" y="2121223"/>
-                  </a:lnTo>
-                  <a:lnTo>
-                    <a:pt x="3366258" y="2093889"/>
-                  </a:lnTo>
-                  <a:lnTo>
-                    <a:pt x="3294636" y="2071181"/>
-                  </a:lnTo>
-                  <a:lnTo>
-                    <a:pt x="3223013" y="2047862"/>
-                  </a:lnTo>
-                  <a:lnTo>
-                    <a:pt x="3151391" y="2023917"/>
-                  </a:lnTo>
-                  <a:lnTo>
-                    <a:pt x="3079768" y="1999328"/>
-                  </a:lnTo>
-                  <a:lnTo>
-                    <a:pt x="3008146" y="1974078"/>
-                  </a:lnTo>
-                  <a:lnTo>
-                    <a:pt x="2936523" y="1948149"/>
-                  </a:lnTo>
-                  <a:lnTo>
-                    <a:pt x="2864901" y="1921524"/>
-                  </a:lnTo>
-                  <a:lnTo>
-                    <a:pt x="2793278" y="1894183"/>
-                  </a:lnTo>
-                  <a:lnTo>
-                    <a:pt x="2721655" y="1866107"/>
-                  </a:lnTo>
-                  <a:lnTo>
-                    <a:pt x="2650033" y="1837276"/>
-                  </a:lnTo>
-                  <a:lnTo>
-                    <a:pt x="2578410" y="1807671"/>
-                  </a:lnTo>
-                  <a:lnTo>
-                    <a:pt x="2506788" y="1777270"/>
-                  </a:lnTo>
-                  <a:lnTo>
-                    <a:pt x="2435165" y="1746052"/>
-                  </a:lnTo>
-                  <a:lnTo>
-                    <a:pt x="2363543" y="1713995"/>
-                  </a:lnTo>
-                  <a:lnTo>
-                    <a:pt x="2291920" y="1681076"/>
-                  </a:lnTo>
-                  <a:lnTo>
-                    <a:pt x="2220298" y="1647273"/>
-                  </a:lnTo>
-                  <a:lnTo>
-                    <a:pt x="2148675" y="1612561"/>
-                  </a:lnTo>
-                  <a:lnTo>
-                    <a:pt x="2077053" y="1576916"/>
-                  </a:lnTo>
-                  <a:lnTo>
-                    <a:pt x="2005430" y="1540313"/>
-                  </a:lnTo>
-                  <a:lnTo>
-                    <a:pt x="1933808" y="1502726"/>
-                  </a:lnTo>
-                  <a:lnTo>
-                    <a:pt x="1862185" y="1464130"/>
-                  </a:lnTo>
-                  <a:lnTo>
-                    <a:pt x="1790563" y="1424495"/>
-                  </a:lnTo>
-                  <a:lnTo>
-                    <a:pt x="1718940" y="1383796"/>
-                  </a:lnTo>
-                  <a:lnTo>
-                    <a:pt x="1647318" y="1342003"/>
-                  </a:lnTo>
-                  <a:lnTo>
-                    <a:pt x="1575695" y="1299086"/>
-                  </a:lnTo>
-                  <a:lnTo>
-                    <a:pt x="1504073" y="1255016"/>
-                  </a:lnTo>
-                  <a:lnTo>
-                    <a:pt x="1432450" y="1209762"/>
-                  </a:lnTo>
-                  <a:lnTo>
-                    <a:pt x="1360827" y="1163291"/>
-                  </a:lnTo>
-                  <a:lnTo>
-                    <a:pt x="1289205" y="1115571"/>
-                  </a:lnTo>
-                  <a:lnTo>
-                    <a:pt x="1217582" y="1066569"/>
-                  </a:lnTo>
-                  <a:lnTo>
-                    <a:pt x="1145960" y="1016249"/>
-                  </a:lnTo>
-                  <a:lnTo>
-                    <a:pt x="1074337" y="964578"/>
-                  </a:lnTo>
-                  <a:lnTo>
-                    <a:pt x="1002715" y="911517"/>
-                  </a:lnTo>
-                  <a:lnTo>
-                    <a:pt x="931092" y="857031"/>
-                  </a:lnTo>
-                  <a:lnTo>
-                    <a:pt x="859470" y="801080"/>
-                  </a:lnTo>
-                  <a:lnTo>
-                    <a:pt x="787847" y="743625"/>
-                  </a:lnTo>
-                  <a:lnTo>
-                    <a:pt x="716225" y="684626"/>
-                  </a:lnTo>
-                  <a:lnTo>
-                    <a:pt x="644602" y="624042"/>
-                  </a:lnTo>
-                  <a:lnTo>
-                    <a:pt x="572980" y="561829"/>
-                  </a:lnTo>
-                  <a:lnTo>
-                    <a:pt x="501357" y="497944"/>
-                  </a:lnTo>
-                  <a:lnTo>
-                    <a:pt x="429735" y="432342"/>
-                  </a:lnTo>
-                  <a:lnTo>
-                    <a:pt x="358112" y="364976"/>
-                  </a:lnTo>
-                  <a:lnTo>
-                    <a:pt x="286490" y="295801"/>
-                  </a:lnTo>
-                  <a:lnTo>
-                    <a:pt x="214867" y="224766"/>
-                  </a:lnTo>
-                  <a:lnTo>
-                    <a:pt x="143245" y="151822"/>
-                  </a:lnTo>
-                  <a:lnTo>
-                    <a:pt x="71622" y="76917"/>
+                    <a:pt x="7019007" y="2880875"/>
+                  </a:lnTo>
+                  <a:lnTo>
+                    <a:pt x="6947385" y="2877186"/>
+                  </a:lnTo>
+                  <a:lnTo>
+                    <a:pt x="6875762" y="2873318"/>
+                  </a:lnTo>
+                  <a:lnTo>
+                    <a:pt x="6804139" y="2869261"/>
+                  </a:lnTo>
+                  <a:lnTo>
+                    <a:pt x="6732517" y="2865007"/>
+                  </a:lnTo>
+                  <a:lnTo>
+                    <a:pt x="6660894" y="2860545"/>
+                  </a:lnTo>
+                  <a:lnTo>
+                    <a:pt x="6589272" y="2855865"/>
+                  </a:lnTo>
+                  <a:lnTo>
+                    <a:pt x="6517649" y="2850958"/>
+                  </a:lnTo>
+                  <a:lnTo>
+                    <a:pt x="6446027" y="2845811"/>
+                  </a:lnTo>
+                  <a:lnTo>
+                    <a:pt x="6374404" y="2840413"/>
+                  </a:lnTo>
+                  <a:lnTo>
+                    <a:pt x="6302782" y="2834752"/>
+                  </a:lnTo>
+                  <a:lnTo>
+                    <a:pt x="6231159" y="2828815"/>
+                  </a:lnTo>
+                  <a:lnTo>
+                    <a:pt x="6159537" y="2822588"/>
+                  </a:lnTo>
+                  <a:lnTo>
+                    <a:pt x="6087914" y="2816058"/>
+                  </a:lnTo>
+                  <a:lnTo>
+                    <a:pt x="6016292" y="2809210"/>
+                  </a:lnTo>
+                  <a:lnTo>
+                    <a:pt x="5944669" y="2802027"/>
+                  </a:lnTo>
+                  <a:lnTo>
+                    <a:pt x="5873047" y="2794495"/>
+                  </a:lnTo>
+                  <a:lnTo>
+                    <a:pt x="5801424" y="2786595"/>
+                  </a:lnTo>
+                  <a:lnTo>
+                    <a:pt x="5729802" y="2778310"/>
+                  </a:lnTo>
+                  <a:lnTo>
+                    <a:pt x="5658179" y="2769621"/>
+                  </a:lnTo>
+                  <a:lnTo>
+                    <a:pt x="5586557" y="2760509"/>
+                  </a:lnTo>
+                  <a:lnTo>
+                    <a:pt x="5514934" y="2750952"/>
+                  </a:lnTo>
+                  <a:lnTo>
+                    <a:pt x="5443311" y="2740929"/>
+                  </a:lnTo>
+                  <a:lnTo>
+                    <a:pt x="5371689" y="2730418"/>
+                  </a:lnTo>
+                  <a:lnTo>
+                    <a:pt x="5300066" y="2719394"/>
+                  </a:lnTo>
+                  <a:lnTo>
+                    <a:pt x="5228444" y="2707833"/>
+                  </a:lnTo>
+                  <a:lnTo>
+                    <a:pt x="5156821" y="2695708"/>
+                  </a:lnTo>
+                  <a:lnTo>
+                    <a:pt x="5085199" y="2682992"/>
+                  </a:lnTo>
+                  <a:lnTo>
+                    <a:pt x="5013576" y="2669656"/>
+                  </a:lnTo>
+                  <a:lnTo>
+                    <a:pt x="4941954" y="2655670"/>
+                  </a:lnTo>
+                  <a:lnTo>
+                    <a:pt x="4870331" y="2641001"/>
+                  </a:lnTo>
+                  <a:lnTo>
+                    <a:pt x="4798709" y="2625618"/>
+                  </a:lnTo>
+                  <a:lnTo>
+                    <a:pt x="4727086" y="2609485"/>
+                  </a:lnTo>
+                  <a:lnTo>
+                    <a:pt x="4655464" y="2592565"/>
+                  </a:lnTo>
+                  <a:lnTo>
+                    <a:pt x="4583841" y="2574820"/>
+                  </a:lnTo>
+                  <a:lnTo>
+                    <a:pt x="4512219" y="2556210"/>
+                  </a:lnTo>
+                  <a:lnTo>
+                    <a:pt x="4440596" y="2536693"/>
+                  </a:lnTo>
+                  <a:lnTo>
+                    <a:pt x="4368974" y="2516224"/>
+                  </a:lnTo>
+                  <a:lnTo>
+                    <a:pt x="4297351" y="2494758"/>
+                  </a:lnTo>
+                  <a:lnTo>
+                    <a:pt x="4225729" y="2472244"/>
+                  </a:lnTo>
+                  <a:lnTo>
+                    <a:pt x="4154106" y="2448633"/>
+                  </a:lnTo>
+                  <a:lnTo>
+                    <a:pt x="4082483" y="2423871"/>
+                  </a:lnTo>
+                  <a:lnTo>
+                    <a:pt x="4010861" y="2397902"/>
+                  </a:lnTo>
+                  <a:lnTo>
+                    <a:pt x="3939238" y="2370666"/>
+                  </a:lnTo>
+                  <a:lnTo>
+                    <a:pt x="3867616" y="2342103"/>
+                  </a:lnTo>
+                  <a:lnTo>
+                    <a:pt x="3795993" y="2312147"/>
+                  </a:lnTo>
+                  <a:lnTo>
+                    <a:pt x="3724371" y="2280731"/>
+                  </a:lnTo>
+                  <a:lnTo>
+                    <a:pt x="3652748" y="2247783"/>
+                  </a:lnTo>
+                  <a:lnTo>
+                    <a:pt x="3581126" y="2213228"/>
+                  </a:lnTo>
+                  <a:lnTo>
+                    <a:pt x="3509503" y="2176989"/>
+                  </a:lnTo>
+                  <a:lnTo>
+                    <a:pt x="3437881" y="2138983"/>
+                  </a:lnTo>
+                  <a:lnTo>
+                    <a:pt x="3366258" y="2111537"/>
+                  </a:lnTo>
+                  <a:lnTo>
+                    <a:pt x="3294636" y="2088717"/>
+                  </a:lnTo>
+                  <a:lnTo>
+                    <a:pt x="3223013" y="2065281"/>
+                  </a:lnTo>
+                  <a:lnTo>
+                    <a:pt x="3151391" y="2041212"/>
+                  </a:lnTo>
+                  <a:lnTo>
+                    <a:pt x="3079768" y="2016493"/>
+                  </a:lnTo>
+                  <a:lnTo>
+                    <a:pt x="3008146" y="1991107"/>
+                  </a:lnTo>
+                  <a:lnTo>
+                    <a:pt x="2936523" y="1965034"/>
+                  </a:lnTo>
+                  <a:lnTo>
+                    <a:pt x="2864901" y="1938258"/>
+                  </a:lnTo>
+                  <a:lnTo>
+                    <a:pt x="2793278" y="1910759"/>
+                  </a:lnTo>
+                  <a:lnTo>
+                    <a:pt x="2721655" y="1882517"/>
+                  </a:lnTo>
+                  <a:lnTo>
+                    <a:pt x="2650033" y="1853512"/>
+                  </a:lnTo>
+                  <a:lnTo>
+                    <a:pt x="2578410" y="1823724"/>
+                  </a:lnTo>
+                  <a:lnTo>
+                    <a:pt x="2506788" y="1793132"/>
+                  </a:lnTo>
+                  <a:lnTo>
+                    <a:pt x="2435165" y="1761713"/>
+                  </a:lnTo>
+                  <a:lnTo>
+                    <a:pt x="2363543" y="1729446"/>
+                  </a:lnTo>
+                  <a:lnTo>
+                    <a:pt x="2291920" y="1696307"/>
+                  </a:lnTo>
+                  <a:lnTo>
+                    <a:pt x="2220298" y="1662274"/>
+                  </a:lnTo>
+                  <a:lnTo>
+                    <a:pt x="2148675" y="1627321"/>
+                  </a:lnTo>
+                  <a:lnTo>
+                    <a:pt x="2077053" y="1591424"/>
+                  </a:lnTo>
+                  <a:lnTo>
+                    <a:pt x="2005430" y="1554559"/>
+                  </a:lnTo>
+                  <a:lnTo>
+                    <a:pt x="1933808" y="1516697"/>
+                  </a:lnTo>
+                  <a:lnTo>
+                    <a:pt x="1862185" y="1477813"/>
+                  </a:lnTo>
+                  <a:lnTo>
+                    <a:pt x="1790563" y="1437879"/>
+                  </a:lnTo>
+                  <a:lnTo>
+                    <a:pt x="1718940" y="1396866"/>
+                  </a:lnTo>
+                  <a:lnTo>
+                    <a:pt x="1647318" y="1354746"/>
+                  </a:lnTo>
+                  <a:lnTo>
+                    <a:pt x="1575695" y="1311488"/>
+                  </a:lnTo>
+                  <a:lnTo>
+                    <a:pt x="1504073" y="1267062"/>
+                  </a:lnTo>
+                  <a:lnTo>
+                    <a:pt x="1432450" y="1221436"/>
+                  </a:lnTo>
+                  <a:lnTo>
+                    <a:pt x="1360827" y="1174579"/>
+                  </a:lnTo>
+                  <a:lnTo>
+                    <a:pt x="1289205" y="1126455"/>
+                  </a:lnTo>
+                  <a:lnTo>
+                    <a:pt x="1217582" y="1077032"/>
+                  </a:lnTo>
+                  <a:lnTo>
+                    <a:pt x="1145960" y="1026275"/>
+                  </a:lnTo>
+                  <a:lnTo>
+                    <a:pt x="1074337" y="974146"/>
+                  </a:lnTo>
+                  <a:lnTo>
+                    <a:pt x="1002715" y="920610"/>
+                  </a:lnTo>
+                  <a:lnTo>
+                    <a:pt x="931092" y="865628"/>
+                  </a:lnTo>
+                  <a:lnTo>
+                    <a:pt x="859470" y="809161"/>
+                  </a:lnTo>
+                  <a:lnTo>
+                    <a:pt x="787847" y="751169"/>
+                  </a:lnTo>
+                  <a:lnTo>
+                    <a:pt x="716225" y="691611"/>
+                  </a:lnTo>
+                  <a:lnTo>
+                    <a:pt x="644602" y="630445"/>
+                  </a:lnTo>
+                  <a:lnTo>
+                    <a:pt x="572980" y="567627"/>
+                  </a:lnTo>
+                  <a:lnTo>
+                    <a:pt x="501357" y="503112"/>
+                  </a:lnTo>
+                  <a:lnTo>
+                    <a:pt x="429735" y="436855"/>
+                  </a:lnTo>
+                  <a:lnTo>
+                    <a:pt x="358112" y="368809"/>
+                  </a:lnTo>
+                  <a:lnTo>
+                    <a:pt x="286490" y="298925"/>
+                  </a:lnTo>
+                  <a:lnTo>
+                    <a:pt x="214867" y="227154"/>
+                  </a:lnTo>
+                  <a:lnTo>
+                    <a:pt x="143245" y="153444"/>
+                  </a:lnTo>
+                  <a:lnTo>
+                    <a:pt x="71622" y="77744"/>
                   </a:lnTo>
                   <a:lnTo>
                     <a:pt x="0" y="0"/>
@@ -4611,288 +4611,285 @@
           </p:nvSpPr>
           <p:spPr>
             <a:xfrm>
-              <a:off x="1809309" y="2073503"/>
-              <a:ext cx="6453370" cy="3359382"/>
+              <a:off x="1819643" y="2073503"/>
+              <a:ext cx="6443036" cy="3360266"/>
             </a:xfrm>
             <a:custGeom>
               <a:avLst/>
               <a:pathLst>
-                <a:path w="6453370" h="3359382">
+                <a:path w="6443036" h="3360266">
                   <a:moveTo>
                     <a:pt x="0" y="0"/>
                   </a:moveTo>
                   <a:lnTo>
-                    <a:pt x="7342" y="13405"/>
-                  </a:lnTo>
-                  <a:lnTo>
-                    <a:pt x="78965" y="139416"/>
-                  </a:lnTo>
-                  <a:lnTo>
-                    <a:pt x="150587" y="260852"/>
-                  </a:lnTo>
-                  <a:lnTo>
-                    <a:pt x="222210" y="377878"/>
-                  </a:lnTo>
-                  <a:lnTo>
-                    <a:pt x="293832" y="490655"/>
-                  </a:lnTo>
-                  <a:lnTo>
-                    <a:pt x="365455" y="599337"/>
-                  </a:lnTo>
-                  <a:lnTo>
-                    <a:pt x="437077" y="704073"/>
-                  </a:lnTo>
-                  <a:lnTo>
-                    <a:pt x="508700" y="805005"/>
-                  </a:lnTo>
-                  <a:lnTo>
-                    <a:pt x="580322" y="902273"/>
-                  </a:lnTo>
-                  <a:lnTo>
-                    <a:pt x="651945" y="996008"/>
-                  </a:lnTo>
-                  <a:lnTo>
-                    <a:pt x="723568" y="1086340"/>
-                  </a:lnTo>
-                  <a:lnTo>
-                    <a:pt x="795190" y="1173392"/>
-                  </a:lnTo>
-                  <a:lnTo>
-                    <a:pt x="866813" y="1257283"/>
-                  </a:lnTo>
-                  <a:lnTo>
-                    <a:pt x="938435" y="1338128"/>
-                  </a:lnTo>
-                  <a:lnTo>
-                    <a:pt x="1010058" y="1416038"/>
-                  </a:lnTo>
-                  <a:lnTo>
-                    <a:pt x="1081680" y="1491118"/>
-                  </a:lnTo>
-                  <a:lnTo>
-                    <a:pt x="1153303" y="1563472"/>
-                  </a:lnTo>
-                  <a:lnTo>
-                    <a:pt x="1224925" y="1633199"/>
-                  </a:lnTo>
-                  <a:lnTo>
-                    <a:pt x="1296548" y="1700394"/>
-                  </a:lnTo>
-                  <a:lnTo>
-                    <a:pt x="1368170" y="1765149"/>
-                  </a:lnTo>
-                  <a:lnTo>
-                    <a:pt x="1439793" y="1827553"/>
-                  </a:lnTo>
-                  <a:lnTo>
-                    <a:pt x="1511415" y="1887691"/>
-                  </a:lnTo>
-                  <a:lnTo>
-                    <a:pt x="1583038" y="1945645"/>
-                  </a:lnTo>
-                  <a:lnTo>
-                    <a:pt x="1654660" y="2001495"/>
-                  </a:lnTo>
-                  <a:lnTo>
-                    <a:pt x="1726283" y="2055317"/>
-                  </a:lnTo>
-                  <a:lnTo>
-                    <a:pt x="1797905" y="2107185"/>
-                  </a:lnTo>
-                  <a:lnTo>
-                    <a:pt x="1869528" y="2157169"/>
-                  </a:lnTo>
-                  <a:lnTo>
-                    <a:pt x="1941150" y="2205338"/>
-                  </a:lnTo>
-                  <a:lnTo>
-                    <a:pt x="2012773" y="2251758"/>
-                  </a:lnTo>
-                  <a:lnTo>
-                    <a:pt x="2084396" y="2296493"/>
-                  </a:lnTo>
-                  <a:lnTo>
-                    <a:pt x="2156018" y="2339603"/>
-                  </a:lnTo>
-                  <a:lnTo>
-                    <a:pt x="2227641" y="2381148"/>
-                  </a:lnTo>
-                  <a:lnTo>
-                    <a:pt x="2299263" y="2421184"/>
-                  </a:lnTo>
-                  <a:lnTo>
-                    <a:pt x="2370886" y="2459767"/>
-                  </a:lnTo>
-                  <a:lnTo>
-                    <a:pt x="2442508" y="2496949"/>
-                  </a:lnTo>
-                  <a:lnTo>
-                    <a:pt x="2514131" y="2532780"/>
-                  </a:lnTo>
-                  <a:lnTo>
-                    <a:pt x="2585753" y="2567311"/>
-                  </a:lnTo>
-                  <a:lnTo>
-                    <a:pt x="2657376" y="2600587"/>
-                  </a:lnTo>
-                  <a:lnTo>
-                    <a:pt x="2728998" y="2632656"/>
-                  </a:lnTo>
-                  <a:lnTo>
-                    <a:pt x="2800621" y="2663559"/>
-                  </a:lnTo>
-                  <a:lnTo>
-                    <a:pt x="2872243" y="2693341"/>
-                  </a:lnTo>
-                  <a:lnTo>
-                    <a:pt x="2943866" y="2722042"/>
-                  </a:lnTo>
-                  <a:lnTo>
-                    <a:pt x="3015488" y="2749700"/>
-                  </a:lnTo>
-                  <a:lnTo>
-                    <a:pt x="3087111" y="2776354"/>
-                  </a:lnTo>
-                  <a:lnTo>
-                    <a:pt x="3158733" y="2802040"/>
-                  </a:lnTo>
-                  <a:lnTo>
-                    <a:pt x="3230356" y="2826793"/>
-                  </a:lnTo>
-                  <a:lnTo>
-                    <a:pt x="3301978" y="2850648"/>
-                  </a:lnTo>
-                  <a:lnTo>
-                    <a:pt x="3373601" y="2873636"/>
-                  </a:lnTo>
-                  <a:lnTo>
-                    <a:pt x="3445224" y="2895790"/>
-                  </a:lnTo>
-                  <a:lnTo>
-                    <a:pt x="3516846" y="2917139"/>
-                  </a:lnTo>
-                  <a:lnTo>
-                    <a:pt x="3588469" y="2937713"/>
-                  </a:lnTo>
-                  <a:lnTo>
-                    <a:pt x="3660091" y="2957540"/>
-                  </a:lnTo>
-                  <a:lnTo>
-                    <a:pt x="3731714" y="2976647"/>
-                  </a:lnTo>
-                  <a:lnTo>
-                    <a:pt x="3803336" y="2995060"/>
-                  </a:lnTo>
-                  <a:lnTo>
-                    <a:pt x="3874959" y="3012805"/>
-                  </a:lnTo>
-                  <a:lnTo>
-                    <a:pt x="3946581" y="3029905"/>
-                  </a:lnTo>
-                  <a:lnTo>
-                    <a:pt x="4018204" y="3046385"/>
-                  </a:lnTo>
-                  <a:lnTo>
-                    <a:pt x="4089826" y="3062266"/>
-                  </a:lnTo>
-                  <a:lnTo>
-                    <a:pt x="4161449" y="3077570"/>
-                  </a:lnTo>
-                  <a:lnTo>
-                    <a:pt x="4233071" y="3092319"/>
-                  </a:lnTo>
-                  <a:lnTo>
-                    <a:pt x="4304694" y="3106532"/>
-                  </a:lnTo>
-                  <a:lnTo>
-                    <a:pt x="4376316" y="3120229"/>
-                  </a:lnTo>
-                  <a:lnTo>
-                    <a:pt x="4447939" y="3133428"/>
-                  </a:lnTo>
-                  <a:lnTo>
-                    <a:pt x="4519561" y="3146149"/>
-                  </a:lnTo>
-                  <a:lnTo>
-                    <a:pt x="4591184" y="3158407"/>
-                  </a:lnTo>
-                  <a:lnTo>
-                    <a:pt x="4662806" y="3170221"/>
-                  </a:lnTo>
-                  <a:lnTo>
-                    <a:pt x="4734429" y="3181605"/>
-                  </a:lnTo>
-                  <a:lnTo>
-                    <a:pt x="4806052" y="3192576"/>
-                  </a:lnTo>
-                  <a:lnTo>
-                    <a:pt x="4877674" y="3203149"/>
-                  </a:lnTo>
-                  <a:lnTo>
-                    <a:pt x="4949297" y="3213337"/>
-                  </a:lnTo>
-                  <a:lnTo>
-                    <a:pt x="5020919" y="3223156"/>
-                  </a:lnTo>
-                  <a:lnTo>
-                    <a:pt x="5092542" y="3232619"/>
-                  </a:lnTo>
-                  <a:lnTo>
-                    <a:pt x="5164164" y="3241737"/>
-                  </a:lnTo>
-                  <a:lnTo>
-                    <a:pt x="5235787" y="3250525"/>
-                  </a:lnTo>
-                  <a:lnTo>
-                    <a:pt x="5307409" y="3258993"/>
-                  </a:lnTo>
-                  <a:lnTo>
-                    <a:pt x="5379032" y="3267154"/>
-                  </a:lnTo>
-                  <a:lnTo>
-                    <a:pt x="5450654" y="3275019"/>
-                  </a:lnTo>
-                  <a:lnTo>
-                    <a:pt x="5522277" y="3282598"/>
-                  </a:lnTo>
-                  <a:lnTo>
-                    <a:pt x="5593899" y="3289902"/>
-                  </a:lnTo>
-                  <a:lnTo>
-                    <a:pt x="5665522" y="3296941"/>
-                  </a:lnTo>
-                  <a:lnTo>
-                    <a:pt x="5737144" y="3303724"/>
-                  </a:lnTo>
-                  <a:lnTo>
-                    <a:pt x="5808767" y="3310260"/>
-                  </a:lnTo>
-                  <a:lnTo>
-                    <a:pt x="5880389" y="3316560"/>
-                  </a:lnTo>
-                  <a:lnTo>
-                    <a:pt x="5952012" y="3322631"/>
-                  </a:lnTo>
-                  <a:lnTo>
-                    <a:pt x="6023634" y="3328481"/>
-                  </a:lnTo>
-                  <a:lnTo>
-                    <a:pt x="6095257" y="3334119"/>
-                  </a:lnTo>
-                  <a:lnTo>
-                    <a:pt x="6166880" y="3339552"/>
-                  </a:lnTo>
-                  <a:lnTo>
-                    <a:pt x="6238502" y="3344788"/>
-                  </a:lnTo>
-                  <a:lnTo>
-                    <a:pt x="6310125" y="3349833"/>
-                  </a:lnTo>
-                  <a:lnTo>
-                    <a:pt x="6381747" y="3354696"/>
-                  </a:lnTo>
-                  <a:lnTo>
-                    <a:pt x="6453370" y="3359382"/>
+                    <a:pt x="68631" y="121847"/>
+                  </a:lnTo>
+                  <a:lnTo>
+                    <a:pt x="140253" y="244371"/>
+                  </a:lnTo>
+                  <a:lnTo>
+                    <a:pt x="211876" y="362430"/>
+                  </a:lnTo>
+                  <a:lnTo>
+                    <a:pt x="283499" y="476186"/>
+                  </a:lnTo>
+                  <a:lnTo>
+                    <a:pt x="355121" y="585796"/>
+                  </a:lnTo>
+                  <a:lnTo>
+                    <a:pt x="426744" y="691411"/>
+                  </a:lnTo>
+                  <a:lnTo>
+                    <a:pt x="498366" y="793178"/>
+                  </a:lnTo>
+                  <a:lnTo>
+                    <a:pt x="569989" y="891235"/>
+                  </a:lnTo>
+                  <a:lnTo>
+                    <a:pt x="641611" y="985719"/>
+                  </a:lnTo>
+                  <a:lnTo>
+                    <a:pt x="713234" y="1076759"/>
+                  </a:lnTo>
+                  <a:lnTo>
+                    <a:pt x="784856" y="1164481"/>
+                  </a:lnTo>
+                  <a:lnTo>
+                    <a:pt x="856479" y="1249007"/>
+                  </a:lnTo>
+                  <a:lnTo>
+                    <a:pt x="928101" y="1330451"/>
+                  </a:lnTo>
+                  <a:lnTo>
+                    <a:pt x="999724" y="1408928"/>
+                  </a:lnTo>
+                  <a:lnTo>
+                    <a:pt x="1071346" y="1484544"/>
+                  </a:lnTo>
+                  <a:lnTo>
+                    <a:pt x="1142969" y="1557405"/>
+                  </a:lnTo>
+                  <a:lnTo>
+                    <a:pt x="1214591" y="1627610"/>
+                  </a:lnTo>
+                  <a:lnTo>
+                    <a:pt x="1286214" y="1695257"/>
+                  </a:lnTo>
+                  <a:lnTo>
+                    <a:pt x="1357836" y="1760438"/>
+                  </a:lnTo>
+                  <a:lnTo>
+                    <a:pt x="1429459" y="1823244"/>
+                  </a:lnTo>
+                  <a:lnTo>
+                    <a:pt x="1501081" y="1883761"/>
+                  </a:lnTo>
+                  <a:lnTo>
+                    <a:pt x="1572704" y="1942072"/>
+                  </a:lnTo>
+                  <a:lnTo>
+                    <a:pt x="1644327" y="1998258"/>
+                  </a:lnTo>
+                  <a:lnTo>
+                    <a:pt x="1715949" y="2052396"/>
+                  </a:lnTo>
+                  <a:lnTo>
+                    <a:pt x="1787572" y="2104562"/>
+                  </a:lnTo>
+                  <a:lnTo>
+                    <a:pt x="1859194" y="2154826"/>
+                  </a:lnTo>
+                  <a:lnTo>
+                    <a:pt x="1930817" y="2203258"/>
+                  </a:lnTo>
+                  <a:lnTo>
+                    <a:pt x="2002439" y="2249925"/>
+                  </a:lnTo>
+                  <a:lnTo>
+                    <a:pt x="2074062" y="2294892"/>
+                  </a:lnTo>
+                  <a:lnTo>
+                    <a:pt x="2145684" y="2338219"/>
+                  </a:lnTo>
+                  <a:lnTo>
+                    <a:pt x="2217307" y="2379968"/>
+                  </a:lnTo>
+                  <a:lnTo>
+                    <a:pt x="2288929" y="2420195"/>
+                  </a:lnTo>
+                  <a:lnTo>
+                    <a:pt x="2360552" y="2458956"/>
+                  </a:lnTo>
+                  <a:lnTo>
+                    <a:pt x="2432174" y="2496304"/>
+                  </a:lnTo>
+                  <a:lnTo>
+                    <a:pt x="2503797" y="2532292"/>
+                  </a:lnTo>
+                  <a:lnTo>
+                    <a:pt x="2575419" y="2566967"/>
+                  </a:lnTo>
+                  <a:lnTo>
+                    <a:pt x="2647042" y="2600379"/>
+                  </a:lnTo>
+                  <a:lnTo>
+                    <a:pt x="2718664" y="2632573"/>
+                  </a:lnTo>
+                  <a:lnTo>
+                    <a:pt x="2790287" y="2663594"/>
+                  </a:lnTo>
+                  <a:lnTo>
+                    <a:pt x="2861909" y="2693484"/>
+                  </a:lnTo>
+                  <a:lnTo>
+                    <a:pt x="2933532" y="2722285"/>
+                  </a:lnTo>
+                  <a:lnTo>
+                    <a:pt x="3005155" y="2750037"/>
+                  </a:lnTo>
+                  <a:lnTo>
+                    <a:pt x="3076777" y="2776777"/>
+                  </a:lnTo>
+                  <a:lnTo>
+                    <a:pt x="3148400" y="2802542"/>
+                  </a:lnTo>
+                  <a:lnTo>
+                    <a:pt x="3220022" y="2827369"/>
+                  </a:lnTo>
+                  <a:lnTo>
+                    <a:pt x="3291645" y="2851290"/>
+                  </a:lnTo>
+                  <a:lnTo>
+                    <a:pt x="3363267" y="2874340"/>
+                  </a:lnTo>
+                  <a:lnTo>
+                    <a:pt x="3434890" y="2896550"/>
+                  </a:lnTo>
+                  <a:lnTo>
+                    <a:pt x="3506512" y="2917950"/>
+                  </a:lnTo>
+                  <a:lnTo>
+                    <a:pt x="3578135" y="2938570"/>
+                  </a:lnTo>
+                  <a:lnTo>
+                    <a:pt x="3649757" y="2958439"/>
+                  </a:lnTo>
+                  <a:lnTo>
+                    <a:pt x="3721380" y="2977584"/>
+                  </a:lnTo>
+                  <a:lnTo>
+                    <a:pt x="3793002" y="2996031"/>
+                  </a:lnTo>
+                  <a:lnTo>
+                    <a:pt x="3864625" y="3013806"/>
+                  </a:lnTo>
+                  <a:lnTo>
+                    <a:pt x="3936247" y="3030933"/>
+                  </a:lnTo>
+                  <a:lnTo>
+                    <a:pt x="4007870" y="3047435"/>
+                  </a:lnTo>
+                  <a:lnTo>
+                    <a:pt x="4079492" y="3063337"/>
+                  </a:lnTo>
+                  <a:lnTo>
+                    <a:pt x="4151115" y="3078658"/>
+                  </a:lnTo>
+                  <a:lnTo>
+                    <a:pt x="4222737" y="3093422"/>
+                  </a:lnTo>
+                  <a:lnTo>
+                    <a:pt x="4294360" y="3107647"/>
+                  </a:lnTo>
+                  <a:lnTo>
+                    <a:pt x="4365983" y="3121354"/>
+                  </a:lnTo>
+                  <a:lnTo>
+                    <a:pt x="4437605" y="3134561"/>
+                  </a:lnTo>
+                  <a:lnTo>
+                    <a:pt x="4509228" y="3147287"/>
+                  </a:lnTo>
+                  <a:lnTo>
+                    <a:pt x="4580850" y="3159550"/>
+                  </a:lnTo>
+                  <a:lnTo>
+                    <a:pt x="4652473" y="3171365"/>
+                  </a:lnTo>
+                  <a:lnTo>
+                    <a:pt x="4724095" y="3182750"/>
+                  </a:lnTo>
+                  <a:lnTo>
+                    <a:pt x="4795718" y="3193719"/>
+                  </a:lnTo>
+                  <a:lnTo>
+                    <a:pt x="4867340" y="3204289"/>
+                  </a:lnTo>
+                  <a:lnTo>
+                    <a:pt x="4938963" y="3214474"/>
+                  </a:lnTo>
+                  <a:lnTo>
+                    <a:pt x="5010585" y="3224288"/>
+                  </a:lnTo>
+                  <a:lnTo>
+                    <a:pt x="5082208" y="3233744"/>
+                  </a:lnTo>
+                  <a:lnTo>
+                    <a:pt x="5153830" y="3242855"/>
+                  </a:lnTo>
+                  <a:lnTo>
+                    <a:pt x="5225453" y="3251634"/>
+                  </a:lnTo>
+                  <a:lnTo>
+                    <a:pt x="5297075" y="3260093"/>
+                  </a:lnTo>
+                  <a:lnTo>
+                    <a:pt x="5368698" y="3268244"/>
+                  </a:lnTo>
+                  <a:lnTo>
+                    <a:pt x="5440320" y="3276098"/>
+                  </a:lnTo>
+                  <a:lnTo>
+                    <a:pt x="5511943" y="3283666"/>
+                  </a:lnTo>
+                  <a:lnTo>
+                    <a:pt x="5583565" y="3290958"/>
+                  </a:lnTo>
+                  <a:lnTo>
+                    <a:pt x="5655188" y="3297984"/>
+                  </a:lnTo>
+                  <a:lnTo>
+                    <a:pt x="5726811" y="3304754"/>
+                  </a:lnTo>
+                  <a:lnTo>
+                    <a:pt x="5798433" y="3311278"/>
+                  </a:lnTo>
+                  <a:lnTo>
+                    <a:pt x="5870056" y="3317563"/>
+                  </a:lnTo>
+                  <a:lnTo>
+                    <a:pt x="5941678" y="3323620"/>
+                  </a:lnTo>
+                  <a:lnTo>
+                    <a:pt x="6013301" y="3329455"/>
+                  </a:lnTo>
+                  <a:lnTo>
+                    <a:pt x="6084923" y="3335079"/>
+                  </a:lnTo>
+                  <a:lnTo>
+                    <a:pt x="6156546" y="3340497"/>
+                  </a:lnTo>
+                  <a:lnTo>
+                    <a:pt x="6228168" y="3345717"/>
+                  </a:lnTo>
+                  <a:lnTo>
+                    <a:pt x="6299791" y="3350748"/>
+                  </a:lnTo>
+                  <a:lnTo>
+                    <a:pt x="6371413" y="3355595"/>
+                  </a:lnTo>
+                  <a:lnTo>
+                    <a:pt x="6443036" y="3360266"/>
                   </a:lnTo>
                 </a:path>
               </a:pathLst>
@@ -5776,7 +5773,7 @@
                   <a:latin typeface="Helvetica"/>
                   <a:cs typeface="Helvetica"/>
                 </a:rPr>
-                <a:t>subHR per 10 % decline: 1.56 (1.38-1.77), p_Bonf = &lt;0.001 (n = 6)  |  per IQR decline (Δ = 29.3 %): 3.67 (2.54-5.31)  |  IQR: [-14.6, 14.7] %</a:t>
+                <a:t>subHR per 10 % decline: 1.56 (1.38-1.77), p_Bonf = &lt;0.001 (n = 6)  |  per IQR decline (Δ = 29.3 %): 3.69 (2.55-5.34)  |  IQR: [-14.6, 14.7] %</a:t>
               </a:r>
             </a:p>
           </p:txBody>
